--- a/public/lessons/year-6-maths/autumn/week-3/explain-and-check-long-multiplication/teaching-powerpoint-v1.pptx
+++ b/public/lessons/year-6-maths/autumn/week-3/explain-and-check-long-multiplication/teaching-powerpoint-v1.pptx
@@ -2,24 +2,24 @@
 <file path=ppt/presentation.xml><?xml version="1.0" encoding="utf-8"?>
 <p:presentation xmlns:p="http://schemas.openxmlformats.org/presentationml/2006/main">
   <p:sldMasterIdLst>
-    <p:sldMasterId xmlns:r="http://schemas.openxmlformats.org/officeDocument/2006/relationships" id="2147483648" r:id="Re7d87f51712d44ff"/>
+    <p:sldMasterId xmlns:r="http://schemas.openxmlformats.org/officeDocument/2006/relationships" id="2147483648" r:id="R8344925bc73f4601"/>
   </p:sldMasterIdLst>
   <p:notesMasterIdLst>
-    <p:notesMasterId xmlns:r="http://schemas.openxmlformats.org/officeDocument/2006/relationships" r:id="R508b7d94bc584f37"/>
+    <p:notesMasterId xmlns:r="http://schemas.openxmlformats.org/officeDocument/2006/relationships" r:id="Re31365bd55164145"/>
   </p:notesMasterIdLst>
   <p:sldIdLst>
-    <p:sldId xmlns:r="http://schemas.openxmlformats.org/officeDocument/2006/relationships" id="256" r:id="R445f0201f9894efa"/>
-    <p:sldId xmlns:r="http://schemas.openxmlformats.org/officeDocument/2006/relationships" id="257" r:id="R6b710540c2f442bc"/>
-    <p:sldId xmlns:r="http://schemas.openxmlformats.org/officeDocument/2006/relationships" id="258" r:id="R656219ec0d3d4a02"/>
-    <p:sldId xmlns:r="http://schemas.openxmlformats.org/officeDocument/2006/relationships" id="259" r:id="Re5925acdf0de4c31"/>
-    <p:sldId xmlns:r="http://schemas.openxmlformats.org/officeDocument/2006/relationships" id="260" r:id="R25ce9e615d6146d1"/>
-    <p:sldId xmlns:r="http://schemas.openxmlformats.org/officeDocument/2006/relationships" id="261" r:id="R0b15708f3e56436b"/>
-    <p:sldId xmlns:r="http://schemas.openxmlformats.org/officeDocument/2006/relationships" id="262" r:id="R7cc1339f65234214"/>
-    <p:sldId xmlns:r="http://schemas.openxmlformats.org/officeDocument/2006/relationships" id="263" r:id="R61d5e65110b74281"/>
-    <p:sldId xmlns:r="http://schemas.openxmlformats.org/officeDocument/2006/relationships" id="264" r:id="Ra1414d319f9d4f71"/>
-    <p:sldId xmlns:r="http://schemas.openxmlformats.org/officeDocument/2006/relationships" id="265" r:id="R6bf46537ce854ea9"/>
-    <p:sldId xmlns:r="http://schemas.openxmlformats.org/officeDocument/2006/relationships" id="266" r:id="R3677ba5734944838"/>
-    <p:sldId xmlns:r="http://schemas.openxmlformats.org/officeDocument/2006/relationships" id="267" r:id="Ra0724c7df288481f"/>
+    <p:sldId xmlns:r="http://schemas.openxmlformats.org/officeDocument/2006/relationships" id="256" r:id="R9a3c6294546a4598"/>
+    <p:sldId xmlns:r="http://schemas.openxmlformats.org/officeDocument/2006/relationships" id="257" r:id="R9fec2d04eb1f4692"/>
+    <p:sldId xmlns:r="http://schemas.openxmlformats.org/officeDocument/2006/relationships" id="258" r:id="Re1894ac651aa433c"/>
+    <p:sldId xmlns:r="http://schemas.openxmlformats.org/officeDocument/2006/relationships" id="259" r:id="R8289f7b03047425e"/>
+    <p:sldId xmlns:r="http://schemas.openxmlformats.org/officeDocument/2006/relationships" id="260" r:id="R1e745490683b405c"/>
+    <p:sldId xmlns:r="http://schemas.openxmlformats.org/officeDocument/2006/relationships" id="261" r:id="R5928cd17868043d4"/>
+    <p:sldId xmlns:r="http://schemas.openxmlformats.org/officeDocument/2006/relationships" id="262" r:id="Rac490d4babfb4700"/>
+    <p:sldId xmlns:r="http://schemas.openxmlformats.org/officeDocument/2006/relationships" id="263" r:id="R98e10270db464302"/>
+    <p:sldId xmlns:r="http://schemas.openxmlformats.org/officeDocument/2006/relationships" id="264" r:id="Rbcc4a75798114815"/>
+    <p:sldId xmlns:r="http://schemas.openxmlformats.org/officeDocument/2006/relationships" id="265" r:id="R3846e9bc98c24071"/>
+    <p:sldId xmlns:r="http://schemas.openxmlformats.org/officeDocument/2006/relationships" id="266" r:id="R4f0526c457784133"/>
+    <p:sldId xmlns:r="http://schemas.openxmlformats.org/officeDocument/2006/relationships" id="267" r:id="R07e080e1aa85480b"/>
   </p:sldIdLst>
   <p:sldSz cx="12192000" cy="6858000"/>
   <p:notesSz cx="6858000" cy="9144000"/>
@@ -873,7 +873,7 @@
           <a:lstStyle xmlns:a="http://schemas.openxmlformats.org/drawingml/2006/main"/>
           <a:p xmlns:a="http://schemas.openxmlformats.org/drawingml/2006/main">
             <a:r>
-              <a:t>I do. Reveal the question, setup and each calculation stage one click at a time. Pupils watch before copying. Model answer: He treated 40 as 4. The correct product is 14,670.</a:t>
+              <a:t>I do. Reveal the question, then reveal each mathematical change one click at a time. Point to the numbers and operation that changed before moving to the next line. Final answer: He treated 40 as 4. The correct product is 14,670.</a:t>
             </a:r>
           </a:p>
         </p:txBody>
@@ -1291,7 +1291,7 @@
   </p:cSld>
   <p:clrMap bg1="lt1" tx1="dk1" bg2="lt2" tx2="dk2" accent1="accent1" accent2="accent2" accent3="accent3" accent4="accent4" accent5="accent5" accent6="accent6" hlink="hlink" folHlink="folHlink"/>
   <p:sldLayoutIdLst>
-    <p:sldLayoutId xmlns:r="http://schemas.openxmlformats.org/officeDocument/2006/relationships" id="2147483649" r:id="R89088ce12636415b"/>
+    <p:sldLayoutId xmlns:r="http://schemas.openxmlformats.org/officeDocument/2006/relationships" id="2147483649" r:id="R57bbb84954764d39"/>
   </p:sldLayoutIdLst>
   <p:txStyles>
     <p:titleStyle>
@@ -1842,7 +1842,7 @@
           <p:cNvPr id="12" name="">
             <a:extLst xmlns:a="http://schemas.openxmlformats.org/drawingml/2006/main">
               <a:ext uri="{FF2B5EF4-FFF2-40B4-BE49-F238E27FC236}">
-                <a16:creationId xmlns:a16="http://schemas.microsoft.com/office/drawing/2014/main" id="{061CA75E-366E-4F08-93EC-1073425BF4BC}"/>
+                <a16:creationId xmlns:a16="http://schemas.microsoft.com/office/drawing/2014/main" id="{71CD1C63-B64A-4957-A662-ADAA712788D0}"/>
               </a:ext>
             </a:extLst>
           </p:cNvPr>
@@ -1874,7 +1874,7 @@
           <p:cNvPr id="2" name="">
             <a:extLst xmlns:a="http://schemas.openxmlformats.org/drawingml/2006/main">
               <a:ext uri="{FF2B5EF4-FFF2-40B4-BE49-F238E27FC236}">
-                <a16:creationId xmlns:a16="http://schemas.microsoft.com/office/drawing/2014/main" id="{801FD675-97A1-41F4-9A2D-ABC18D3C8625}"/>
+                <a16:creationId xmlns:a16="http://schemas.microsoft.com/office/drawing/2014/main" id="{CF4B6585-5D78-42BC-A550-3E932313E0D6}"/>
               </a:ext>
             </a:extLst>
           </p:cNvPr>
@@ -1931,7 +1931,7 @@
           <p:cNvPr id="3" name="">
             <a:extLst xmlns:a="http://schemas.openxmlformats.org/drawingml/2006/main">
               <a:ext uri="{FF2B5EF4-FFF2-40B4-BE49-F238E27FC236}">
-                <a16:creationId xmlns:a16="http://schemas.microsoft.com/office/drawing/2014/main" id="{EC3B67B3-5ACA-4928-958E-05DFB586A4CE}"/>
+                <a16:creationId xmlns:a16="http://schemas.microsoft.com/office/drawing/2014/main" id="{EBBD9CD2-FF0D-4AB4-8EAD-CEBE5EE118C1}"/>
               </a:ext>
             </a:extLst>
           </p:cNvPr>
@@ -1965,7 +1965,7 @@
           <p:cNvPr id="4" name="">
             <a:extLst xmlns:a="http://schemas.openxmlformats.org/drawingml/2006/main">
               <a:ext uri="{FF2B5EF4-FFF2-40B4-BE49-F238E27FC236}">
-                <a16:creationId xmlns:a16="http://schemas.microsoft.com/office/drawing/2014/main" id="{9078ECF0-4983-4C1B-9704-6206E5C8BEB1}"/>
+                <a16:creationId xmlns:a16="http://schemas.microsoft.com/office/drawing/2014/main" id="{17B1D012-EEBE-4582-AA6D-539FE00E276A}"/>
               </a:ext>
             </a:extLst>
           </p:cNvPr>
@@ -2022,7 +2022,7 @@
           <p:cNvPr id="5" name="">
             <a:extLst xmlns:a="http://schemas.openxmlformats.org/drawingml/2006/main">
               <a:ext uri="{FF2B5EF4-FFF2-40B4-BE49-F238E27FC236}">
-                <a16:creationId xmlns:a16="http://schemas.microsoft.com/office/drawing/2014/main" id="{A919AB6A-565B-4EF3-BD91-2EB5A52B900A}"/>
+                <a16:creationId xmlns:a16="http://schemas.microsoft.com/office/drawing/2014/main" id="{22E3C7FA-80B1-4B69-8549-C3FB05DD706D}"/>
               </a:ext>
             </a:extLst>
           </p:cNvPr>
@@ -2079,7 +2079,7 @@
           <p:cNvPr id="6" name="">
             <a:extLst xmlns:a="http://schemas.openxmlformats.org/drawingml/2006/main">
               <a:ext uri="{FF2B5EF4-FFF2-40B4-BE49-F238E27FC236}">
-                <a16:creationId xmlns:a16="http://schemas.microsoft.com/office/drawing/2014/main" id="{1DDCB5B1-D39E-4299-ADCB-90D598FBDD45}"/>
+                <a16:creationId xmlns:a16="http://schemas.microsoft.com/office/drawing/2014/main" id="{F298267D-4D4A-4718-B4D8-0DF16BD59F0C}"/>
               </a:ext>
             </a:extLst>
           </p:cNvPr>
@@ -2113,7 +2113,7 @@
           <p:cNvPr id="7" name="">
             <a:extLst xmlns:a="http://schemas.openxmlformats.org/drawingml/2006/main">
               <a:ext uri="{FF2B5EF4-FFF2-40B4-BE49-F238E27FC236}">
-                <a16:creationId xmlns:a16="http://schemas.microsoft.com/office/drawing/2014/main" id="{180244CF-30F7-477C-8EDF-03A27511C485}"/>
+                <a16:creationId xmlns:a16="http://schemas.microsoft.com/office/drawing/2014/main" id="{6D1697EC-72C4-46FF-B06E-CC2F6C2ABDCD}"/>
               </a:ext>
             </a:extLst>
           </p:cNvPr>
@@ -2170,7 +2170,7 @@
           <p:cNvPr id="8" name="">
             <a:extLst xmlns:a="http://schemas.openxmlformats.org/drawingml/2006/main">
               <a:ext uri="{FF2B5EF4-FFF2-40B4-BE49-F238E27FC236}">
-                <a16:creationId xmlns:a16="http://schemas.microsoft.com/office/drawing/2014/main" id="{F470B013-23E0-4CAF-A24B-15446EB7A6DB}"/>
+                <a16:creationId xmlns:a16="http://schemas.microsoft.com/office/drawing/2014/main" id="{EDA824EC-FB81-4EA1-95FE-07CE03819AE4}"/>
               </a:ext>
             </a:extLst>
           </p:cNvPr>
@@ -2227,7 +2227,7 @@
           <p:cNvPr id="9" name="">
             <a:extLst xmlns:a="http://schemas.openxmlformats.org/drawingml/2006/main">
               <a:ext uri="{FF2B5EF4-FFF2-40B4-BE49-F238E27FC236}">
-                <a16:creationId xmlns:a16="http://schemas.microsoft.com/office/drawing/2014/main" id="{6C054D3F-F4BD-4B0C-B115-FD2F3B08FADA}"/>
+                <a16:creationId xmlns:a16="http://schemas.microsoft.com/office/drawing/2014/main" id="{9C752391-B2FF-43AC-AC97-1AA5D984DA81}"/>
               </a:ext>
             </a:extLst>
           </p:cNvPr>
@@ -2284,7 +2284,7 @@
           <p:cNvPr id="10" name="">
             <a:extLst xmlns:a="http://schemas.openxmlformats.org/drawingml/2006/main">
               <a:ext uri="{FF2B5EF4-FFF2-40B4-BE49-F238E27FC236}">
-                <a16:creationId xmlns:a16="http://schemas.microsoft.com/office/drawing/2014/main" id="{8F467F16-EFBD-4F50-95FD-2762AE6691C0}"/>
+                <a16:creationId xmlns:a16="http://schemas.microsoft.com/office/drawing/2014/main" id="{9B76A3CD-E134-4B92-833B-6DCFD114CC05}"/>
               </a:ext>
             </a:extLst>
           </p:cNvPr>
@@ -2341,7 +2341,7 @@
           <p:cNvPr id="11" name="">
             <a:extLst xmlns:a="http://schemas.openxmlformats.org/drawingml/2006/main">
               <a:ext uri="{FF2B5EF4-FFF2-40B4-BE49-F238E27FC236}">
-                <a16:creationId xmlns:a16="http://schemas.microsoft.com/office/drawing/2014/main" id="{00DFD653-0068-4E44-ADC5-397B1C673C34}"/>
+                <a16:creationId xmlns:a16="http://schemas.microsoft.com/office/drawing/2014/main" id="{A78C22E1-A912-4CF4-A7D6-71A3AEA53BAF}"/>
               </a:ext>
             </a:extLst>
           </p:cNvPr>
@@ -2396,7 +2396,7 @@
     </p:spTree>
     <p:extLst>
       <p:ext uri="{BB962C8B-B14F-4D97-AF65-F5344CB8AC3E}">
-        <p14:creationId xmlns:p14="http://schemas.microsoft.com/office/powerpoint/2010/main" val="1816299245"/>
+        <p14:creationId xmlns:p14="http://schemas.microsoft.com/office/powerpoint/2010/main" val="1893589301"/>
       </p:ext>
     </p:extLst>
   </p:cSld>
@@ -2427,7 +2427,7 @@
           <p:cNvPr id="14" name="">
             <a:extLst xmlns:a="http://schemas.openxmlformats.org/drawingml/2006/main">
               <a:ext uri="{FF2B5EF4-FFF2-40B4-BE49-F238E27FC236}">
-                <a16:creationId xmlns:a16="http://schemas.microsoft.com/office/drawing/2014/main" id="{E96C9B77-46A2-4E81-B79A-AD91682F775E}"/>
+                <a16:creationId xmlns:a16="http://schemas.microsoft.com/office/drawing/2014/main" id="{1C1800BD-7747-444F-9DB9-1F22441C762F}"/>
               </a:ext>
             </a:extLst>
           </p:cNvPr>
@@ -2459,7 +2459,7 @@
           <p:cNvPr id="2" name="">
             <a:extLst xmlns:a="http://schemas.openxmlformats.org/drawingml/2006/main">
               <a:ext uri="{FF2B5EF4-FFF2-40B4-BE49-F238E27FC236}">
-                <a16:creationId xmlns:a16="http://schemas.microsoft.com/office/drawing/2014/main" id="{873D7A3C-A560-416A-A9AF-F8AD3B96D477}"/>
+                <a16:creationId xmlns:a16="http://schemas.microsoft.com/office/drawing/2014/main" id="{583E8A43-A020-4A9A-B2DA-B74D392D89C0}"/>
               </a:ext>
             </a:extLst>
           </p:cNvPr>
@@ -2516,7 +2516,7 @@
           <p:cNvPr id="3" name="">
             <a:extLst xmlns:a="http://schemas.openxmlformats.org/drawingml/2006/main">
               <a:ext uri="{FF2B5EF4-FFF2-40B4-BE49-F238E27FC236}">
-                <a16:creationId xmlns:a16="http://schemas.microsoft.com/office/drawing/2014/main" id="{107CCE21-2C75-4288-B231-C1A0CAFD8E49}"/>
+                <a16:creationId xmlns:a16="http://schemas.microsoft.com/office/drawing/2014/main" id="{0C395966-A56A-45ED-94A0-62B64C956CA6}"/>
               </a:ext>
             </a:extLst>
           </p:cNvPr>
@@ -2548,7 +2548,7 @@
           <p:cNvPr id="4" name="">
             <a:extLst xmlns:a="http://schemas.openxmlformats.org/drawingml/2006/main">
               <a:ext uri="{FF2B5EF4-FFF2-40B4-BE49-F238E27FC236}">
-                <a16:creationId xmlns:a16="http://schemas.microsoft.com/office/drawing/2014/main" id="{EB4B3FAE-6F2F-468D-9234-5DA2F201B677}"/>
+                <a16:creationId xmlns:a16="http://schemas.microsoft.com/office/drawing/2014/main" id="{F7BBDA62-961E-46B6-9CAC-2B2A374E93FD}"/>
               </a:ext>
             </a:extLst>
           </p:cNvPr>
@@ -2605,7 +2605,7 @@
           <p:cNvPr id="5" name="">
             <a:extLst xmlns:a="http://schemas.openxmlformats.org/drawingml/2006/main">
               <a:ext uri="{FF2B5EF4-FFF2-40B4-BE49-F238E27FC236}">
-                <a16:creationId xmlns:a16="http://schemas.microsoft.com/office/drawing/2014/main" id="{6FADF219-3B49-4D55-BE8C-668D64299883}"/>
+                <a16:creationId xmlns:a16="http://schemas.microsoft.com/office/drawing/2014/main" id="{440909E7-1C31-4319-A515-6BB52C1CE3D7}"/>
               </a:ext>
             </a:extLst>
           </p:cNvPr>
@@ -2662,7 +2662,7 @@
           <p:cNvPr id="6" name="">
             <a:extLst xmlns:a="http://schemas.openxmlformats.org/drawingml/2006/main">
               <a:ext uri="{FF2B5EF4-FFF2-40B4-BE49-F238E27FC236}">
-                <a16:creationId xmlns:a16="http://schemas.microsoft.com/office/drawing/2014/main" id="{BB0F1A40-B8A8-45A3-93DD-3876F4C54AB5}"/>
+                <a16:creationId xmlns:a16="http://schemas.microsoft.com/office/drawing/2014/main" id="{3CC78CB1-3B3C-435D-B2A1-5C7250FF9738}"/>
               </a:ext>
             </a:extLst>
           </p:cNvPr>
@@ -2719,7 +2719,7 @@
           <p:cNvPr id="7" name="">
             <a:extLst xmlns:a="http://schemas.openxmlformats.org/drawingml/2006/main">
               <a:ext uri="{FF2B5EF4-FFF2-40B4-BE49-F238E27FC236}">
-                <a16:creationId xmlns:a16="http://schemas.microsoft.com/office/drawing/2014/main" id="{9994C34F-F23C-42C6-892C-8B348FA94160}"/>
+                <a16:creationId xmlns:a16="http://schemas.microsoft.com/office/drawing/2014/main" id="{2CE06238-9F06-4BCA-81A8-EC488C886F46}"/>
               </a:ext>
             </a:extLst>
           </p:cNvPr>
@@ -2751,7 +2751,7 @@
           <p:cNvPr id="8" name="">
             <a:extLst xmlns:a="http://schemas.openxmlformats.org/drawingml/2006/main">
               <a:ext uri="{FF2B5EF4-FFF2-40B4-BE49-F238E27FC236}">
-                <a16:creationId xmlns:a16="http://schemas.microsoft.com/office/drawing/2014/main" id="{201DEB13-9BCC-45DA-A128-CB8432164BD5}"/>
+                <a16:creationId xmlns:a16="http://schemas.microsoft.com/office/drawing/2014/main" id="{64C29776-043B-4EB7-A8C3-9C1315DEA8D3}"/>
               </a:ext>
             </a:extLst>
           </p:cNvPr>
@@ -2808,7 +2808,7 @@
           <p:cNvPr id="9" name="">
             <a:extLst xmlns:a="http://schemas.openxmlformats.org/drawingml/2006/main">
               <a:ext uri="{FF2B5EF4-FFF2-40B4-BE49-F238E27FC236}">
-                <a16:creationId xmlns:a16="http://schemas.microsoft.com/office/drawing/2014/main" id="{AC9BFBC4-CB07-41CB-AB98-5EC87CD93C80}"/>
+                <a16:creationId xmlns:a16="http://schemas.microsoft.com/office/drawing/2014/main" id="{40684251-B345-489A-8BF1-19B86876116F}"/>
               </a:ext>
             </a:extLst>
           </p:cNvPr>
@@ -2865,7 +2865,7 @@
           <p:cNvPr id="10" name="">
             <a:extLst xmlns:a="http://schemas.openxmlformats.org/drawingml/2006/main">
               <a:ext uri="{FF2B5EF4-FFF2-40B4-BE49-F238E27FC236}">
-                <a16:creationId xmlns:a16="http://schemas.microsoft.com/office/drawing/2014/main" id="{CC038D36-EB60-4B4D-B64B-55C6583EC72A}"/>
+                <a16:creationId xmlns:a16="http://schemas.microsoft.com/office/drawing/2014/main" id="{964F52C0-24A7-4FEE-800C-0AE9B6DF40BB}"/>
               </a:ext>
             </a:extLst>
           </p:cNvPr>
@@ -2922,7 +2922,7 @@
           <p:cNvPr id="11" name="">
             <a:extLst xmlns:a="http://schemas.openxmlformats.org/drawingml/2006/main">
               <a:ext uri="{FF2B5EF4-FFF2-40B4-BE49-F238E27FC236}">
-                <a16:creationId xmlns:a16="http://schemas.microsoft.com/office/drawing/2014/main" id="{4C135ADA-D1B7-4DB0-8CDC-A119B1EEB878}"/>
+                <a16:creationId xmlns:a16="http://schemas.microsoft.com/office/drawing/2014/main" id="{2C47F7F8-A2F0-4195-B4BC-931F653084E8}"/>
               </a:ext>
             </a:extLst>
           </p:cNvPr>
@@ -2979,7 +2979,7 @@
           <p:cNvPr id="12" name="">
             <a:extLst xmlns:a="http://schemas.openxmlformats.org/drawingml/2006/main">
               <a:ext uri="{FF2B5EF4-FFF2-40B4-BE49-F238E27FC236}">
-                <a16:creationId xmlns:a16="http://schemas.microsoft.com/office/drawing/2014/main" id="{BCC12543-49E2-4E62-917D-C7A7257E07E7}"/>
+                <a16:creationId xmlns:a16="http://schemas.microsoft.com/office/drawing/2014/main" id="{C7F1EC09-45BC-4167-BAD9-4609D91220D8}"/>
               </a:ext>
             </a:extLst>
           </p:cNvPr>
@@ -3036,7 +3036,7 @@
           <p:cNvPr id="13" name="">
             <a:extLst xmlns:a="http://schemas.openxmlformats.org/drawingml/2006/main">
               <a:ext uri="{FF2B5EF4-FFF2-40B4-BE49-F238E27FC236}">
-                <a16:creationId xmlns:a16="http://schemas.microsoft.com/office/drawing/2014/main" id="{8B5036EF-6663-41B3-9972-D08512D4CE36}"/>
+                <a16:creationId xmlns:a16="http://schemas.microsoft.com/office/drawing/2014/main" id="{59673567-FB1D-4CE5-B7A7-D15273C5D04E}"/>
               </a:ext>
             </a:extLst>
           </p:cNvPr>
@@ -3091,7 +3091,7 @@
     </p:spTree>
     <p:extLst>
       <p:ext uri="{BB962C8B-B14F-4D97-AF65-F5344CB8AC3E}">
-        <p14:creationId xmlns:p14="http://schemas.microsoft.com/office/powerpoint/2010/main" val="1102748259"/>
+        <p14:creationId xmlns:p14="http://schemas.microsoft.com/office/powerpoint/2010/main" val="722575722"/>
       </p:ext>
     </p:extLst>
   </p:cSld>
@@ -3292,7 +3292,7 @@
           <p:cNvPr id="19" name="">
             <a:extLst xmlns:a="http://schemas.openxmlformats.org/drawingml/2006/main">
               <a:ext uri="{FF2B5EF4-FFF2-40B4-BE49-F238E27FC236}">
-                <a16:creationId xmlns:a16="http://schemas.microsoft.com/office/drawing/2014/main" id="{203929EB-2866-4F95-8A53-B522A0EC4E65}"/>
+                <a16:creationId xmlns:a16="http://schemas.microsoft.com/office/drawing/2014/main" id="{97E3A572-F65E-4C19-8292-7D4C1719D61B}"/>
               </a:ext>
             </a:extLst>
           </p:cNvPr>
@@ -3324,7 +3324,7 @@
           <p:cNvPr id="2" name="">
             <a:extLst xmlns:a="http://schemas.openxmlformats.org/drawingml/2006/main">
               <a:ext uri="{FF2B5EF4-FFF2-40B4-BE49-F238E27FC236}">
-                <a16:creationId xmlns:a16="http://schemas.microsoft.com/office/drawing/2014/main" id="{8550B3E4-DACA-4BFD-96A8-65FB0F86D8CB}"/>
+                <a16:creationId xmlns:a16="http://schemas.microsoft.com/office/drawing/2014/main" id="{75850212-3B79-4A47-81DA-79C18549E945}"/>
               </a:ext>
             </a:extLst>
           </p:cNvPr>
@@ -3381,7 +3381,7 @@
           <p:cNvPr id="3" name="">
             <a:extLst xmlns:a="http://schemas.openxmlformats.org/drawingml/2006/main">
               <a:ext uri="{FF2B5EF4-FFF2-40B4-BE49-F238E27FC236}">
-                <a16:creationId xmlns:a16="http://schemas.microsoft.com/office/drawing/2014/main" id="{A5BB9DAE-7D51-4027-ADE5-4A2C90FA3188}"/>
+                <a16:creationId xmlns:a16="http://schemas.microsoft.com/office/drawing/2014/main" id="{0EA0641E-E6D9-4E7A-8E56-F370178B2E7D}"/>
               </a:ext>
             </a:extLst>
           </p:cNvPr>
@@ -3413,7 +3413,7 @@
           <p:cNvPr id="4" name="">
             <a:extLst xmlns:a="http://schemas.openxmlformats.org/drawingml/2006/main">
               <a:ext uri="{FF2B5EF4-FFF2-40B4-BE49-F238E27FC236}">
-                <a16:creationId xmlns:a16="http://schemas.microsoft.com/office/drawing/2014/main" id="{0E2E1500-3F64-4616-8185-82E15CFB9AF9}"/>
+                <a16:creationId xmlns:a16="http://schemas.microsoft.com/office/drawing/2014/main" id="{A8673DB7-7392-49E0-B0C7-DCE31F05FB78}"/>
               </a:ext>
             </a:extLst>
           </p:cNvPr>
@@ -3470,7 +3470,7 @@
           <p:cNvPr id="5" name="">
             <a:extLst xmlns:a="http://schemas.openxmlformats.org/drawingml/2006/main">
               <a:ext uri="{FF2B5EF4-FFF2-40B4-BE49-F238E27FC236}">
-                <a16:creationId xmlns:a16="http://schemas.microsoft.com/office/drawing/2014/main" id="{ABB549F8-3567-478F-83C0-C0844AE4B3DA}"/>
+                <a16:creationId xmlns:a16="http://schemas.microsoft.com/office/drawing/2014/main" id="{52888503-A8BC-4D31-9817-D382CD0791F3}"/>
               </a:ext>
             </a:extLst>
           </p:cNvPr>
@@ -3527,7 +3527,7 @@
           <p:cNvPr id="6" name="">
             <a:extLst xmlns:a="http://schemas.openxmlformats.org/drawingml/2006/main">
               <a:ext uri="{FF2B5EF4-FFF2-40B4-BE49-F238E27FC236}">
-                <a16:creationId xmlns:a16="http://schemas.microsoft.com/office/drawing/2014/main" id="{0F6AFBAA-2F25-4923-B49C-69C085F79F9B}"/>
+                <a16:creationId xmlns:a16="http://schemas.microsoft.com/office/drawing/2014/main" id="{B19EC863-1B6D-497C-9AB4-C3B85736AD61}"/>
               </a:ext>
             </a:extLst>
           </p:cNvPr>
@@ -3584,7 +3584,7 @@
           <p:cNvPr id="7" name="">
             <a:extLst xmlns:a="http://schemas.openxmlformats.org/drawingml/2006/main">
               <a:ext uri="{FF2B5EF4-FFF2-40B4-BE49-F238E27FC236}">
-                <a16:creationId xmlns:a16="http://schemas.microsoft.com/office/drawing/2014/main" id="{DE1FBBCF-5A7C-4A54-8304-1DBBFCB08A56}"/>
+                <a16:creationId xmlns:a16="http://schemas.microsoft.com/office/drawing/2014/main" id="{8DBCCB16-4160-4750-9B69-CE9C1894F815}"/>
               </a:ext>
             </a:extLst>
           </p:cNvPr>
@@ -3616,7 +3616,7 @@
           <p:cNvPr id="8" name="">
             <a:extLst xmlns:a="http://schemas.openxmlformats.org/drawingml/2006/main">
               <a:ext uri="{FF2B5EF4-FFF2-40B4-BE49-F238E27FC236}">
-                <a16:creationId xmlns:a16="http://schemas.microsoft.com/office/drawing/2014/main" id="{3F07E703-50AB-43D7-B3D3-605F41A3B0C7}"/>
+                <a16:creationId xmlns:a16="http://schemas.microsoft.com/office/drawing/2014/main" id="{7B9C950C-4D05-4E17-BF28-F10380C16981}"/>
               </a:ext>
             </a:extLst>
           </p:cNvPr>
@@ -3673,7 +3673,7 @@
           <p:cNvPr id="9" name="">
             <a:extLst xmlns:a="http://schemas.openxmlformats.org/drawingml/2006/main">
               <a:ext uri="{FF2B5EF4-FFF2-40B4-BE49-F238E27FC236}">
-                <a16:creationId xmlns:a16="http://schemas.microsoft.com/office/drawing/2014/main" id="{08D97E23-8D3A-45A4-B0C5-A3D375E6722A}"/>
+                <a16:creationId xmlns:a16="http://schemas.microsoft.com/office/drawing/2014/main" id="{8E2A7CD5-9E74-4A36-B54C-6A5760B26F0B}"/>
               </a:ext>
             </a:extLst>
           </p:cNvPr>
@@ -3730,7 +3730,7 @@
           <p:cNvPr id="10" name="">
             <a:extLst xmlns:a="http://schemas.openxmlformats.org/drawingml/2006/main">
               <a:ext uri="{FF2B5EF4-FFF2-40B4-BE49-F238E27FC236}">
-                <a16:creationId xmlns:a16="http://schemas.microsoft.com/office/drawing/2014/main" id="{5914C22F-8E87-428A-B0C6-A39DAEF19A09}"/>
+                <a16:creationId xmlns:a16="http://schemas.microsoft.com/office/drawing/2014/main" id="{35B979A0-742E-4959-85DA-3521CF1CB96D}"/>
               </a:ext>
             </a:extLst>
           </p:cNvPr>
@@ -3787,7 +3787,7 @@
           <p:cNvPr id="11" name="">
             <a:extLst xmlns:a="http://schemas.openxmlformats.org/drawingml/2006/main">
               <a:ext uri="{FF2B5EF4-FFF2-40B4-BE49-F238E27FC236}">
-                <a16:creationId xmlns:a16="http://schemas.microsoft.com/office/drawing/2014/main" id="{F1D3310C-4D4A-42B6-9A43-5ADE822A10DF}"/>
+                <a16:creationId xmlns:a16="http://schemas.microsoft.com/office/drawing/2014/main" id="{82D1CCA2-96B4-4A0B-9779-C2D26DED984B}"/>
               </a:ext>
             </a:extLst>
           </p:cNvPr>
@@ -3821,7 +3821,7 @@
           <p:cNvPr id="12" name="">
             <a:extLst xmlns:a="http://schemas.openxmlformats.org/drawingml/2006/main">
               <a:ext uri="{FF2B5EF4-FFF2-40B4-BE49-F238E27FC236}">
-                <a16:creationId xmlns:a16="http://schemas.microsoft.com/office/drawing/2014/main" id="{77EE8BAA-8B6D-4243-AD4E-7234B64EBDB5}"/>
+                <a16:creationId xmlns:a16="http://schemas.microsoft.com/office/drawing/2014/main" id="{78067A67-21B6-4363-8D33-D57F9E3B71F5}"/>
               </a:ext>
             </a:extLst>
           </p:cNvPr>
@@ -3878,7 +3878,7 @@
           <p:cNvPr id="13" name="">
             <a:extLst xmlns:a="http://schemas.openxmlformats.org/drawingml/2006/main">
               <a:ext uri="{FF2B5EF4-FFF2-40B4-BE49-F238E27FC236}">
-                <a16:creationId xmlns:a16="http://schemas.microsoft.com/office/drawing/2014/main" id="{70A2B1C2-429F-4489-947A-E7EEDAD16D70}"/>
+                <a16:creationId xmlns:a16="http://schemas.microsoft.com/office/drawing/2014/main" id="{FB53F75D-25DB-4955-8737-523CC500F6A7}"/>
               </a:ext>
             </a:extLst>
           </p:cNvPr>
@@ -3935,7 +3935,7 @@
           <p:cNvPr id="14" name="">
             <a:extLst xmlns:a="http://schemas.openxmlformats.org/drawingml/2006/main">
               <a:ext uri="{FF2B5EF4-FFF2-40B4-BE49-F238E27FC236}">
-                <a16:creationId xmlns:a16="http://schemas.microsoft.com/office/drawing/2014/main" id="{BF4D87C7-45D6-42B4-83F4-CDBEB3A61EBF}"/>
+                <a16:creationId xmlns:a16="http://schemas.microsoft.com/office/drawing/2014/main" id="{367113BB-DEA3-441B-93A5-1F32E8E2864C}"/>
               </a:ext>
             </a:extLst>
           </p:cNvPr>
@@ -3992,7 +3992,7 @@
           <p:cNvPr id="15" name="">
             <a:extLst xmlns:a="http://schemas.openxmlformats.org/drawingml/2006/main">
               <a:ext uri="{FF2B5EF4-FFF2-40B4-BE49-F238E27FC236}">
-                <a16:creationId xmlns:a16="http://schemas.microsoft.com/office/drawing/2014/main" id="{F34E1699-2451-4872-832D-A4D7EA0032D6}"/>
+                <a16:creationId xmlns:a16="http://schemas.microsoft.com/office/drawing/2014/main" id="{FADB16A5-8FF4-4EAC-B6AD-89859B95057D}"/>
               </a:ext>
             </a:extLst>
           </p:cNvPr>
@@ -4026,7 +4026,7 @@
           <p:cNvPr id="16" name="">
             <a:extLst xmlns:a="http://schemas.openxmlformats.org/drawingml/2006/main">
               <a:ext uri="{FF2B5EF4-FFF2-40B4-BE49-F238E27FC236}">
-                <a16:creationId xmlns:a16="http://schemas.microsoft.com/office/drawing/2014/main" id="{194C047D-FDD8-4395-885D-C05158E20706}"/>
+                <a16:creationId xmlns:a16="http://schemas.microsoft.com/office/drawing/2014/main" id="{5D849013-E7C8-4EC9-9548-041EEE052B67}"/>
               </a:ext>
             </a:extLst>
           </p:cNvPr>
@@ -4083,7 +4083,7 @@
           <p:cNvPr id="17" name="">
             <a:extLst xmlns:a="http://schemas.openxmlformats.org/drawingml/2006/main">
               <a:ext uri="{FF2B5EF4-FFF2-40B4-BE49-F238E27FC236}">
-                <a16:creationId xmlns:a16="http://schemas.microsoft.com/office/drawing/2014/main" id="{0464713D-D747-42FA-A18C-0599105E89E0}"/>
+                <a16:creationId xmlns:a16="http://schemas.microsoft.com/office/drawing/2014/main" id="{96546569-CBBF-4C1A-9EF6-AAA94AF227A3}"/>
               </a:ext>
             </a:extLst>
           </p:cNvPr>
@@ -4140,7 +4140,7 @@
           <p:cNvPr id="18" name="">
             <a:extLst xmlns:a="http://schemas.openxmlformats.org/drawingml/2006/main">
               <a:ext uri="{FF2B5EF4-FFF2-40B4-BE49-F238E27FC236}">
-                <a16:creationId xmlns:a16="http://schemas.microsoft.com/office/drawing/2014/main" id="{4D443335-9A59-40E8-9749-1CBD905D585C}"/>
+                <a16:creationId xmlns:a16="http://schemas.microsoft.com/office/drawing/2014/main" id="{D683723D-1E56-4163-A277-820543450E8F}"/>
               </a:ext>
             </a:extLst>
           </p:cNvPr>
@@ -4195,7 +4195,7 @@
     </p:spTree>
     <p:extLst>
       <p:ext uri="{BB962C8B-B14F-4D97-AF65-F5344CB8AC3E}">
-        <p14:creationId xmlns:p14="http://schemas.microsoft.com/office/powerpoint/2010/main" val="129783679"/>
+        <p14:creationId xmlns:p14="http://schemas.microsoft.com/office/powerpoint/2010/main" val="1322508056"/>
       </p:ext>
     </p:extLst>
   </p:cSld>
@@ -4350,7 +4350,7 @@
           <p:cNvPr id="23" name="">
             <a:extLst xmlns:a="http://schemas.openxmlformats.org/drawingml/2006/main">
               <a:ext uri="{FF2B5EF4-FFF2-40B4-BE49-F238E27FC236}">
-                <a16:creationId xmlns:a16="http://schemas.microsoft.com/office/drawing/2014/main" id="{BDE4D876-5EC1-45F7-A388-9D94973A8C30}"/>
+                <a16:creationId xmlns:a16="http://schemas.microsoft.com/office/drawing/2014/main" id="{5D2D2EA4-3FE0-4C00-BC38-150CDABFB82E}"/>
               </a:ext>
             </a:extLst>
           </p:cNvPr>
@@ -4382,7 +4382,7 @@
           <p:cNvPr id="2" name="">
             <a:extLst xmlns:a="http://schemas.openxmlformats.org/drawingml/2006/main">
               <a:ext uri="{FF2B5EF4-FFF2-40B4-BE49-F238E27FC236}">
-                <a16:creationId xmlns:a16="http://schemas.microsoft.com/office/drawing/2014/main" id="{257B096D-39C7-4A66-A9AE-2D684839C663}"/>
+                <a16:creationId xmlns:a16="http://schemas.microsoft.com/office/drawing/2014/main" id="{0D143A52-298E-4E52-93F5-3E0C392756DD}"/>
               </a:ext>
             </a:extLst>
           </p:cNvPr>
@@ -4439,7 +4439,7 @@
           <p:cNvPr id="3" name="">
             <a:extLst xmlns:a="http://schemas.openxmlformats.org/drawingml/2006/main">
               <a:ext uri="{FF2B5EF4-FFF2-40B4-BE49-F238E27FC236}">
-                <a16:creationId xmlns:a16="http://schemas.microsoft.com/office/drawing/2014/main" id="{C2F5751A-14A0-443D-A6BD-18433368062F}"/>
+                <a16:creationId xmlns:a16="http://schemas.microsoft.com/office/drawing/2014/main" id="{B0826EF0-9331-4632-A32F-A9950AA211A5}"/>
               </a:ext>
             </a:extLst>
           </p:cNvPr>
@@ -4471,7 +4471,7 @@
           <p:cNvPr id="4" name="">
             <a:extLst xmlns:a="http://schemas.openxmlformats.org/drawingml/2006/main">
               <a:ext uri="{FF2B5EF4-FFF2-40B4-BE49-F238E27FC236}">
-                <a16:creationId xmlns:a16="http://schemas.microsoft.com/office/drawing/2014/main" id="{CC82D462-045A-465C-8450-BB260113D1DF}"/>
+                <a16:creationId xmlns:a16="http://schemas.microsoft.com/office/drawing/2014/main" id="{5361C4C3-2935-4379-BA9A-965CD8253768}"/>
               </a:ext>
             </a:extLst>
           </p:cNvPr>
@@ -4528,7 +4528,7 @@
           <p:cNvPr id="5" name="">
             <a:extLst xmlns:a="http://schemas.openxmlformats.org/drawingml/2006/main">
               <a:ext uri="{FF2B5EF4-FFF2-40B4-BE49-F238E27FC236}">
-                <a16:creationId xmlns:a16="http://schemas.microsoft.com/office/drawing/2014/main" id="{8CA6E8EF-7A6C-45A9-B586-BAFDBC9C841E}"/>
+                <a16:creationId xmlns:a16="http://schemas.microsoft.com/office/drawing/2014/main" id="{5EA1010B-ADAD-4546-9E85-E6388D16F73F}"/>
               </a:ext>
             </a:extLst>
           </p:cNvPr>
@@ -4585,7 +4585,7 @@
           <p:cNvPr id="6" name="">
             <a:extLst xmlns:a="http://schemas.openxmlformats.org/drawingml/2006/main">
               <a:ext uri="{FF2B5EF4-FFF2-40B4-BE49-F238E27FC236}">
-                <a16:creationId xmlns:a16="http://schemas.microsoft.com/office/drawing/2014/main" id="{503E1E3A-6507-43D9-A423-EEB2B485DD80}"/>
+                <a16:creationId xmlns:a16="http://schemas.microsoft.com/office/drawing/2014/main" id="{72F08DC1-EDEB-4CB2-9DF6-F2D8D2F90E83}"/>
               </a:ext>
             </a:extLst>
           </p:cNvPr>
@@ -4642,7 +4642,7 @@
           <p:cNvPr id="7" name="">
             <a:extLst xmlns:a="http://schemas.openxmlformats.org/drawingml/2006/main">
               <a:ext uri="{FF2B5EF4-FFF2-40B4-BE49-F238E27FC236}">
-                <a16:creationId xmlns:a16="http://schemas.microsoft.com/office/drawing/2014/main" id="{F8087C75-0BE2-4D55-AEC1-F258F8AF5BB2}"/>
+                <a16:creationId xmlns:a16="http://schemas.microsoft.com/office/drawing/2014/main" id="{50DEA537-F904-49B0-925D-8737421341D9}"/>
               </a:ext>
             </a:extLst>
           </p:cNvPr>
@@ -4674,7 +4674,7 @@
           <p:cNvPr id="8" name="">
             <a:extLst xmlns:a="http://schemas.openxmlformats.org/drawingml/2006/main">
               <a:ext uri="{FF2B5EF4-FFF2-40B4-BE49-F238E27FC236}">
-                <a16:creationId xmlns:a16="http://schemas.microsoft.com/office/drawing/2014/main" id="{5B4D451C-766D-46AB-AD00-10BE21CACF24}"/>
+                <a16:creationId xmlns:a16="http://schemas.microsoft.com/office/drawing/2014/main" id="{59C92953-A0B3-4740-A8EF-1420B19EC2B3}"/>
               </a:ext>
             </a:extLst>
           </p:cNvPr>
@@ -4731,7 +4731,7 @@
           <p:cNvPr id="9" name="">
             <a:extLst xmlns:a="http://schemas.openxmlformats.org/drawingml/2006/main">
               <a:ext uri="{FF2B5EF4-FFF2-40B4-BE49-F238E27FC236}">
-                <a16:creationId xmlns:a16="http://schemas.microsoft.com/office/drawing/2014/main" id="{D1040182-0E7D-4555-ABEB-DCE58DC03817}"/>
+                <a16:creationId xmlns:a16="http://schemas.microsoft.com/office/drawing/2014/main" id="{8A61893A-49F2-4683-985A-0207B7840037}"/>
               </a:ext>
             </a:extLst>
           </p:cNvPr>
@@ -4788,7 +4788,7 @@
           <p:cNvPr id="10" name="">
             <a:extLst xmlns:a="http://schemas.openxmlformats.org/drawingml/2006/main">
               <a:ext uri="{FF2B5EF4-FFF2-40B4-BE49-F238E27FC236}">
-                <a16:creationId xmlns:a16="http://schemas.microsoft.com/office/drawing/2014/main" id="{C2F95749-4866-4289-9491-8F6432A9282F}"/>
+                <a16:creationId xmlns:a16="http://schemas.microsoft.com/office/drawing/2014/main" id="{344E74AC-77A9-4C59-9E40-4D9572D104F1}"/>
               </a:ext>
             </a:extLst>
           </p:cNvPr>
@@ -4822,7 +4822,7 @@
           <p:cNvPr id="11" name="">
             <a:extLst xmlns:a="http://schemas.openxmlformats.org/drawingml/2006/main">
               <a:ext uri="{FF2B5EF4-FFF2-40B4-BE49-F238E27FC236}">
-                <a16:creationId xmlns:a16="http://schemas.microsoft.com/office/drawing/2014/main" id="{1EC4CB7E-E462-4DFD-A665-839451D7D3A6}"/>
+                <a16:creationId xmlns:a16="http://schemas.microsoft.com/office/drawing/2014/main" id="{D448576C-33DD-4B74-BBA4-BEE5FEE0DCA3}"/>
               </a:ext>
             </a:extLst>
           </p:cNvPr>
@@ -4854,7 +4854,7 @@
           <p:cNvPr id="12" name="">
             <a:extLst xmlns:a="http://schemas.openxmlformats.org/drawingml/2006/main">
               <a:ext uri="{FF2B5EF4-FFF2-40B4-BE49-F238E27FC236}">
-                <a16:creationId xmlns:a16="http://schemas.microsoft.com/office/drawing/2014/main" id="{549C8ADF-B814-46ED-B17E-1A09477A08F2}"/>
+                <a16:creationId xmlns:a16="http://schemas.microsoft.com/office/drawing/2014/main" id="{7C6952C4-753D-4786-8B9C-2ABAD9B978DC}"/>
               </a:ext>
             </a:extLst>
           </p:cNvPr>
@@ -4911,7 +4911,7 @@
           <p:cNvPr id="13" name="">
             <a:extLst xmlns:a="http://schemas.openxmlformats.org/drawingml/2006/main">
               <a:ext uri="{FF2B5EF4-FFF2-40B4-BE49-F238E27FC236}">
-                <a16:creationId xmlns:a16="http://schemas.microsoft.com/office/drawing/2014/main" id="{CE62BE76-520E-4478-8474-932AC2B90629}"/>
+                <a16:creationId xmlns:a16="http://schemas.microsoft.com/office/drawing/2014/main" id="{9A5EABD6-097C-448E-8185-03357BC5381F}"/>
               </a:ext>
             </a:extLst>
           </p:cNvPr>
@@ -4968,7 +4968,7 @@
           <p:cNvPr id="14" name="">
             <a:extLst xmlns:a="http://schemas.openxmlformats.org/drawingml/2006/main">
               <a:ext uri="{FF2B5EF4-FFF2-40B4-BE49-F238E27FC236}">
-                <a16:creationId xmlns:a16="http://schemas.microsoft.com/office/drawing/2014/main" id="{08789283-8705-48A5-A785-0ED8E06B3BF0}"/>
+                <a16:creationId xmlns:a16="http://schemas.microsoft.com/office/drawing/2014/main" id="{F2CE5F7C-3974-4C2E-B8BC-FBA9A346831F}"/>
               </a:ext>
             </a:extLst>
           </p:cNvPr>
@@ -5002,7 +5002,7 @@
           <p:cNvPr id="15" name="">
             <a:extLst xmlns:a="http://schemas.openxmlformats.org/drawingml/2006/main">
               <a:ext uri="{FF2B5EF4-FFF2-40B4-BE49-F238E27FC236}">
-                <a16:creationId xmlns:a16="http://schemas.microsoft.com/office/drawing/2014/main" id="{D951AEF5-AB2E-437D-8A0D-D8BB6469906E}"/>
+                <a16:creationId xmlns:a16="http://schemas.microsoft.com/office/drawing/2014/main" id="{8276CE24-5E73-4A07-ACA6-60F284F4CD6D}"/>
               </a:ext>
             </a:extLst>
           </p:cNvPr>
@@ -5034,7 +5034,7 @@
           <p:cNvPr id="16" name="">
             <a:extLst xmlns:a="http://schemas.openxmlformats.org/drawingml/2006/main">
               <a:ext uri="{FF2B5EF4-FFF2-40B4-BE49-F238E27FC236}">
-                <a16:creationId xmlns:a16="http://schemas.microsoft.com/office/drawing/2014/main" id="{FEDD6E5B-C32C-4F80-ADA3-344A2A68796F}"/>
+                <a16:creationId xmlns:a16="http://schemas.microsoft.com/office/drawing/2014/main" id="{58439836-862D-4BA4-AE4E-8591444E2552}"/>
               </a:ext>
             </a:extLst>
           </p:cNvPr>
@@ -5091,7 +5091,7 @@
           <p:cNvPr id="17" name="">
             <a:extLst xmlns:a="http://schemas.openxmlformats.org/drawingml/2006/main">
               <a:ext uri="{FF2B5EF4-FFF2-40B4-BE49-F238E27FC236}">
-                <a16:creationId xmlns:a16="http://schemas.microsoft.com/office/drawing/2014/main" id="{C2C95A8B-8B06-4617-BA4A-45F8FFA201D5}"/>
+                <a16:creationId xmlns:a16="http://schemas.microsoft.com/office/drawing/2014/main" id="{7CD595A7-536B-452E-8FDC-C6FCE2104409}"/>
               </a:ext>
             </a:extLst>
           </p:cNvPr>
@@ -5148,7 +5148,7 @@
           <p:cNvPr id="18" name="">
             <a:extLst xmlns:a="http://schemas.openxmlformats.org/drawingml/2006/main">
               <a:ext uri="{FF2B5EF4-FFF2-40B4-BE49-F238E27FC236}">
-                <a16:creationId xmlns:a16="http://schemas.microsoft.com/office/drawing/2014/main" id="{0EB0CE0E-101F-452D-B7F6-DFAF75E509C7}"/>
+                <a16:creationId xmlns:a16="http://schemas.microsoft.com/office/drawing/2014/main" id="{F4927C36-E6BE-4E2C-9E27-2CB696755622}"/>
               </a:ext>
             </a:extLst>
           </p:cNvPr>
@@ -5182,7 +5182,7 @@
           <p:cNvPr id="19" name="">
             <a:extLst xmlns:a="http://schemas.openxmlformats.org/drawingml/2006/main">
               <a:ext uri="{FF2B5EF4-FFF2-40B4-BE49-F238E27FC236}">
-                <a16:creationId xmlns:a16="http://schemas.microsoft.com/office/drawing/2014/main" id="{5323054E-3A4B-46A0-891B-E2C422557EEF}"/>
+                <a16:creationId xmlns:a16="http://schemas.microsoft.com/office/drawing/2014/main" id="{7C4CF42C-36F0-490D-8F7A-BAFCAF7934B6}"/>
               </a:ext>
             </a:extLst>
           </p:cNvPr>
@@ -5214,7 +5214,7 @@
           <p:cNvPr id="20" name="">
             <a:extLst xmlns:a="http://schemas.openxmlformats.org/drawingml/2006/main">
               <a:ext uri="{FF2B5EF4-FFF2-40B4-BE49-F238E27FC236}">
-                <a16:creationId xmlns:a16="http://schemas.microsoft.com/office/drawing/2014/main" id="{82FD652F-E356-4124-811D-A6E18BB01467}"/>
+                <a16:creationId xmlns:a16="http://schemas.microsoft.com/office/drawing/2014/main" id="{1AA1DCB8-910A-4EAD-88C1-474097914BFA}"/>
               </a:ext>
             </a:extLst>
           </p:cNvPr>
@@ -5271,7 +5271,7 @@
           <p:cNvPr id="21" name="">
             <a:extLst xmlns:a="http://schemas.openxmlformats.org/drawingml/2006/main">
               <a:ext uri="{FF2B5EF4-FFF2-40B4-BE49-F238E27FC236}">
-                <a16:creationId xmlns:a16="http://schemas.microsoft.com/office/drawing/2014/main" id="{9B0325D8-3C93-478C-BB0E-87585C57DF23}"/>
+                <a16:creationId xmlns:a16="http://schemas.microsoft.com/office/drawing/2014/main" id="{53733BE1-D592-4E4A-9509-2A7266E5FBC8}"/>
               </a:ext>
             </a:extLst>
           </p:cNvPr>
@@ -5328,7 +5328,7 @@
           <p:cNvPr id="22" name="">
             <a:extLst xmlns:a="http://schemas.openxmlformats.org/drawingml/2006/main">
               <a:ext uri="{FF2B5EF4-FFF2-40B4-BE49-F238E27FC236}">
-                <a16:creationId xmlns:a16="http://schemas.microsoft.com/office/drawing/2014/main" id="{E583CC32-D506-4E4A-9498-B26C6B228243}"/>
+                <a16:creationId xmlns:a16="http://schemas.microsoft.com/office/drawing/2014/main" id="{6C47D52A-0BA4-43FF-A098-E13C59E9CDE1}"/>
               </a:ext>
             </a:extLst>
           </p:cNvPr>
@@ -5383,7 +5383,7 @@
     </p:spTree>
     <p:extLst>
       <p:ext uri="{BB962C8B-B14F-4D97-AF65-F5344CB8AC3E}">
-        <p14:creationId xmlns:p14="http://schemas.microsoft.com/office/powerpoint/2010/main" val="1277964563"/>
+        <p14:creationId xmlns:p14="http://schemas.microsoft.com/office/powerpoint/2010/main" val="413694458"/>
       </p:ext>
     </p:extLst>
   </p:cSld>
@@ -5584,7 +5584,7 @@
           <p:cNvPr id="23" name="">
             <a:extLst xmlns:a="http://schemas.openxmlformats.org/drawingml/2006/main">
               <a:ext uri="{FF2B5EF4-FFF2-40B4-BE49-F238E27FC236}">
-                <a16:creationId xmlns:a16="http://schemas.microsoft.com/office/drawing/2014/main" id="{B0E91207-103B-4AC0-9BCD-DC223E461E55}"/>
+                <a16:creationId xmlns:a16="http://schemas.microsoft.com/office/drawing/2014/main" id="{37A86FE0-20E6-4FFC-A0ED-6251825838A5}"/>
               </a:ext>
             </a:extLst>
           </p:cNvPr>
@@ -5616,7 +5616,7 @@
           <p:cNvPr id="2" name="">
             <a:extLst xmlns:a="http://schemas.openxmlformats.org/drawingml/2006/main">
               <a:ext uri="{FF2B5EF4-FFF2-40B4-BE49-F238E27FC236}">
-                <a16:creationId xmlns:a16="http://schemas.microsoft.com/office/drawing/2014/main" id="{20E36D6F-0874-4F4C-98A9-CA09F21A3B29}"/>
+                <a16:creationId xmlns:a16="http://schemas.microsoft.com/office/drawing/2014/main" id="{8351F23E-2849-4504-8C14-AC779F1E550C}"/>
               </a:ext>
             </a:extLst>
           </p:cNvPr>
@@ -5673,7 +5673,7 @@
           <p:cNvPr id="3" name="">
             <a:extLst xmlns:a="http://schemas.openxmlformats.org/drawingml/2006/main">
               <a:ext uri="{FF2B5EF4-FFF2-40B4-BE49-F238E27FC236}">
-                <a16:creationId xmlns:a16="http://schemas.microsoft.com/office/drawing/2014/main" id="{EAB15744-C2D1-4636-BBC3-7E0AB448EADE}"/>
+                <a16:creationId xmlns:a16="http://schemas.microsoft.com/office/drawing/2014/main" id="{B754FC4D-711E-437B-8896-98DEE1B82E14}"/>
               </a:ext>
             </a:extLst>
           </p:cNvPr>
@@ -5705,7 +5705,7 @@
           <p:cNvPr id="4" name="">
             <a:extLst xmlns:a="http://schemas.openxmlformats.org/drawingml/2006/main">
               <a:ext uri="{FF2B5EF4-FFF2-40B4-BE49-F238E27FC236}">
-                <a16:creationId xmlns:a16="http://schemas.microsoft.com/office/drawing/2014/main" id="{67B1F9FD-BD0D-40EF-8E50-5EAD1DEC531F}"/>
+                <a16:creationId xmlns:a16="http://schemas.microsoft.com/office/drawing/2014/main" id="{CEAF05B2-1896-483A-A97E-949EAC7FC3B9}"/>
               </a:ext>
             </a:extLst>
           </p:cNvPr>
@@ -5762,7 +5762,7 @@
           <p:cNvPr id="5" name="">
             <a:extLst xmlns:a="http://schemas.openxmlformats.org/drawingml/2006/main">
               <a:ext uri="{FF2B5EF4-FFF2-40B4-BE49-F238E27FC236}">
-                <a16:creationId xmlns:a16="http://schemas.microsoft.com/office/drawing/2014/main" id="{AB496F3B-D5FD-4B37-A73C-A87F8906F653}"/>
+                <a16:creationId xmlns:a16="http://schemas.microsoft.com/office/drawing/2014/main" id="{04E236E1-906C-46FE-873D-398432FB755D}"/>
               </a:ext>
             </a:extLst>
           </p:cNvPr>
@@ -5819,7 +5819,7 @@
           <p:cNvPr id="6" name="">
             <a:extLst xmlns:a="http://schemas.openxmlformats.org/drawingml/2006/main">
               <a:ext uri="{FF2B5EF4-FFF2-40B4-BE49-F238E27FC236}">
-                <a16:creationId xmlns:a16="http://schemas.microsoft.com/office/drawing/2014/main" id="{8E42E3C8-0A65-40C3-BFF2-119CAB892D42}"/>
+                <a16:creationId xmlns:a16="http://schemas.microsoft.com/office/drawing/2014/main" id="{D48862F1-5A49-4115-AF6F-DF9BEFD80831}"/>
               </a:ext>
             </a:extLst>
           </p:cNvPr>
@@ -5876,7 +5876,7 @@
           <p:cNvPr id="7" name="">
             <a:extLst xmlns:a="http://schemas.openxmlformats.org/drawingml/2006/main">
               <a:ext uri="{FF2B5EF4-FFF2-40B4-BE49-F238E27FC236}">
-                <a16:creationId xmlns:a16="http://schemas.microsoft.com/office/drawing/2014/main" id="{55B5593C-3965-4462-A4B9-C1D6379C00DC}"/>
+                <a16:creationId xmlns:a16="http://schemas.microsoft.com/office/drawing/2014/main" id="{5559EBDD-4E8A-4558-9CD3-162D4236A39A}"/>
               </a:ext>
             </a:extLst>
           </p:cNvPr>
@@ -5908,7 +5908,7 @@
           <p:cNvPr id="8" name="">
             <a:extLst xmlns:a="http://schemas.openxmlformats.org/drawingml/2006/main">
               <a:ext uri="{FF2B5EF4-FFF2-40B4-BE49-F238E27FC236}">
-                <a16:creationId xmlns:a16="http://schemas.microsoft.com/office/drawing/2014/main" id="{6AF74311-A331-4DE6-BC8E-37EC868FF2E9}"/>
+                <a16:creationId xmlns:a16="http://schemas.microsoft.com/office/drawing/2014/main" id="{23466468-36CC-459D-B15E-1B67D6D8C1CB}"/>
               </a:ext>
             </a:extLst>
           </p:cNvPr>
@@ -5965,7 +5965,7 @@
           <p:cNvPr id="9" name="">
             <a:extLst xmlns:a="http://schemas.openxmlformats.org/drawingml/2006/main">
               <a:ext uri="{FF2B5EF4-FFF2-40B4-BE49-F238E27FC236}">
-                <a16:creationId xmlns:a16="http://schemas.microsoft.com/office/drawing/2014/main" id="{D03F0A73-A72E-4824-869D-293B97A60F2C}"/>
+                <a16:creationId xmlns:a16="http://schemas.microsoft.com/office/drawing/2014/main" id="{5A8E28DE-8CB4-433B-B6FB-A0004C2BF1F1}"/>
               </a:ext>
             </a:extLst>
           </p:cNvPr>
@@ -6022,7 +6022,7 @@
           <p:cNvPr id="10" name="">
             <a:extLst xmlns:a="http://schemas.openxmlformats.org/drawingml/2006/main">
               <a:ext uri="{FF2B5EF4-FFF2-40B4-BE49-F238E27FC236}">
-                <a16:creationId xmlns:a16="http://schemas.microsoft.com/office/drawing/2014/main" id="{8BEE18CF-AE76-400E-B5FE-D75450D84DEE}"/>
+                <a16:creationId xmlns:a16="http://schemas.microsoft.com/office/drawing/2014/main" id="{420CA738-D738-4328-BE40-6888A8ACB25F}"/>
               </a:ext>
             </a:extLst>
           </p:cNvPr>
@@ -6056,7 +6056,7 @@
           <p:cNvPr id="11" name="">
             <a:extLst xmlns:a="http://schemas.openxmlformats.org/drawingml/2006/main">
               <a:ext uri="{FF2B5EF4-FFF2-40B4-BE49-F238E27FC236}">
-                <a16:creationId xmlns:a16="http://schemas.microsoft.com/office/drawing/2014/main" id="{09A8C6DB-F000-4A40-9421-8ED22A40E748}"/>
+                <a16:creationId xmlns:a16="http://schemas.microsoft.com/office/drawing/2014/main" id="{1BCC9B43-8235-4640-B985-3E3063A52C3B}"/>
               </a:ext>
             </a:extLst>
           </p:cNvPr>
@@ -6088,7 +6088,7 @@
           <p:cNvPr id="12" name="">
             <a:extLst xmlns:a="http://schemas.openxmlformats.org/drawingml/2006/main">
               <a:ext uri="{FF2B5EF4-FFF2-40B4-BE49-F238E27FC236}">
-                <a16:creationId xmlns:a16="http://schemas.microsoft.com/office/drawing/2014/main" id="{C520D00A-A8E4-4267-A116-BF8B52B4681D}"/>
+                <a16:creationId xmlns:a16="http://schemas.microsoft.com/office/drawing/2014/main" id="{A5C3C1DC-1AF7-48D8-AB44-8BC5B5D0C989}"/>
               </a:ext>
             </a:extLst>
           </p:cNvPr>
@@ -6145,7 +6145,7 @@
           <p:cNvPr id="13" name="">
             <a:extLst xmlns:a="http://schemas.openxmlformats.org/drawingml/2006/main">
               <a:ext uri="{FF2B5EF4-FFF2-40B4-BE49-F238E27FC236}">
-                <a16:creationId xmlns:a16="http://schemas.microsoft.com/office/drawing/2014/main" id="{9250164E-E5B3-40FB-BBA1-86A34734D4B5}"/>
+                <a16:creationId xmlns:a16="http://schemas.microsoft.com/office/drawing/2014/main" id="{E960B8ED-CBDF-4D03-9205-7BD524A3AA0D}"/>
               </a:ext>
             </a:extLst>
           </p:cNvPr>
@@ -6202,7 +6202,7 @@
           <p:cNvPr id="14" name="">
             <a:extLst xmlns:a="http://schemas.openxmlformats.org/drawingml/2006/main">
               <a:ext uri="{FF2B5EF4-FFF2-40B4-BE49-F238E27FC236}">
-                <a16:creationId xmlns:a16="http://schemas.microsoft.com/office/drawing/2014/main" id="{CE0E2B11-D9D7-4F86-904F-EDCB1650C871}"/>
+                <a16:creationId xmlns:a16="http://schemas.microsoft.com/office/drawing/2014/main" id="{63FBE654-AD8E-4D24-9E4C-4689F781FC7A}"/>
               </a:ext>
             </a:extLst>
           </p:cNvPr>
@@ -6236,7 +6236,7 @@
           <p:cNvPr id="15" name="">
             <a:extLst xmlns:a="http://schemas.openxmlformats.org/drawingml/2006/main">
               <a:ext uri="{FF2B5EF4-FFF2-40B4-BE49-F238E27FC236}">
-                <a16:creationId xmlns:a16="http://schemas.microsoft.com/office/drawing/2014/main" id="{2F25E97E-6A10-41F6-B08B-8A87D1B059BE}"/>
+                <a16:creationId xmlns:a16="http://schemas.microsoft.com/office/drawing/2014/main" id="{977CBC5C-E484-4964-A1EF-EAC080FF15BB}"/>
               </a:ext>
             </a:extLst>
           </p:cNvPr>
@@ -6268,7 +6268,7 @@
           <p:cNvPr id="16" name="">
             <a:extLst xmlns:a="http://schemas.openxmlformats.org/drawingml/2006/main">
               <a:ext uri="{FF2B5EF4-FFF2-40B4-BE49-F238E27FC236}">
-                <a16:creationId xmlns:a16="http://schemas.microsoft.com/office/drawing/2014/main" id="{32B97EB8-22A1-4447-BC0D-9C70FA4D59A1}"/>
+                <a16:creationId xmlns:a16="http://schemas.microsoft.com/office/drawing/2014/main" id="{0C3C1CE4-5EAD-4EB8-91DD-168E095776F8}"/>
               </a:ext>
             </a:extLst>
           </p:cNvPr>
@@ -6325,7 +6325,7 @@
           <p:cNvPr id="17" name="">
             <a:extLst xmlns:a="http://schemas.openxmlformats.org/drawingml/2006/main">
               <a:ext uri="{FF2B5EF4-FFF2-40B4-BE49-F238E27FC236}">
-                <a16:creationId xmlns:a16="http://schemas.microsoft.com/office/drawing/2014/main" id="{4D25E9FF-2518-429F-956D-72720483EE5B}"/>
+                <a16:creationId xmlns:a16="http://schemas.microsoft.com/office/drawing/2014/main" id="{25458B9D-4FFA-4737-B227-294E15730EEE}"/>
               </a:ext>
             </a:extLst>
           </p:cNvPr>
@@ -6382,7 +6382,7 @@
           <p:cNvPr id="18" name="">
             <a:extLst xmlns:a="http://schemas.openxmlformats.org/drawingml/2006/main">
               <a:ext uri="{FF2B5EF4-FFF2-40B4-BE49-F238E27FC236}">
-                <a16:creationId xmlns:a16="http://schemas.microsoft.com/office/drawing/2014/main" id="{8EF12466-A062-4ABD-AC3B-CE5663C40558}"/>
+                <a16:creationId xmlns:a16="http://schemas.microsoft.com/office/drawing/2014/main" id="{B6AA6AB3-F87E-4ECB-9728-F58D80EFAAA3}"/>
               </a:ext>
             </a:extLst>
           </p:cNvPr>
@@ -6416,7 +6416,7 @@
           <p:cNvPr id="19" name="">
             <a:extLst xmlns:a="http://schemas.openxmlformats.org/drawingml/2006/main">
               <a:ext uri="{FF2B5EF4-FFF2-40B4-BE49-F238E27FC236}">
-                <a16:creationId xmlns:a16="http://schemas.microsoft.com/office/drawing/2014/main" id="{E6DE914D-2DAF-4DC9-A74E-1679BDBAE148}"/>
+                <a16:creationId xmlns:a16="http://schemas.microsoft.com/office/drawing/2014/main" id="{60160299-AF45-4ACE-AB68-35F8015DB893}"/>
               </a:ext>
             </a:extLst>
           </p:cNvPr>
@@ -6448,7 +6448,7 @@
           <p:cNvPr id="20" name="">
             <a:extLst xmlns:a="http://schemas.openxmlformats.org/drawingml/2006/main">
               <a:ext uri="{FF2B5EF4-FFF2-40B4-BE49-F238E27FC236}">
-                <a16:creationId xmlns:a16="http://schemas.microsoft.com/office/drawing/2014/main" id="{9FA83905-EDB5-494B-BEFA-12597D8AF824}"/>
+                <a16:creationId xmlns:a16="http://schemas.microsoft.com/office/drawing/2014/main" id="{0A77F7CB-4A33-421D-9829-F5D96B864576}"/>
               </a:ext>
             </a:extLst>
           </p:cNvPr>
@@ -6505,7 +6505,7 @@
           <p:cNvPr id="21" name="">
             <a:extLst xmlns:a="http://schemas.openxmlformats.org/drawingml/2006/main">
               <a:ext uri="{FF2B5EF4-FFF2-40B4-BE49-F238E27FC236}">
-                <a16:creationId xmlns:a16="http://schemas.microsoft.com/office/drawing/2014/main" id="{A1C7665A-3F35-446B-BDF8-8EE5E256FD76}"/>
+                <a16:creationId xmlns:a16="http://schemas.microsoft.com/office/drawing/2014/main" id="{B57A8D10-D7C5-4666-9A36-D08BE55B2016}"/>
               </a:ext>
             </a:extLst>
           </p:cNvPr>
@@ -6562,7 +6562,7 @@
           <p:cNvPr id="22" name="">
             <a:extLst xmlns:a="http://schemas.openxmlformats.org/drawingml/2006/main">
               <a:ext uri="{FF2B5EF4-FFF2-40B4-BE49-F238E27FC236}">
-                <a16:creationId xmlns:a16="http://schemas.microsoft.com/office/drawing/2014/main" id="{97DA44A0-70C6-4345-BAFF-33FFB0B774E0}"/>
+                <a16:creationId xmlns:a16="http://schemas.microsoft.com/office/drawing/2014/main" id="{01C17CA9-10CB-4708-9AA9-54A5927B4277}"/>
               </a:ext>
             </a:extLst>
           </p:cNvPr>
@@ -6617,7 +6617,7 @@
     </p:spTree>
     <p:extLst>
       <p:ext uri="{BB962C8B-B14F-4D97-AF65-F5344CB8AC3E}">
-        <p14:creationId xmlns:p14="http://schemas.microsoft.com/office/powerpoint/2010/main" val="743491362"/>
+        <p14:creationId xmlns:p14="http://schemas.microsoft.com/office/powerpoint/2010/main" val="1186268338"/>
       </p:ext>
     </p:extLst>
   </p:cSld>
@@ -6818,7 +6818,7 @@
           <p:cNvPr id="16" name="">
             <a:extLst xmlns:a="http://schemas.openxmlformats.org/drawingml/2006/main">
               <a:ext uri="{FF2B5EF4-FFF2-40B4-BE49-F238E27FC236}">
-                <a16:creationId xmlns:a16="http://schemas.microsoft.com/office/drawing/2014/main" id="{4481B9F9-B2B7-4661-AD5A-DECA5E431564}"/>
+                <a16:creationId xmlns:a16="http://schemas.microsoft.com/office/drawing/2014/main" id="{2BAD52B9-5E6B-4391-A1DF-58C617104CFE}"/>
               </a:ext>
             </a:extLst>
           </p:cNvPr>
@@ -6850,7 +6850,7 @@
           <p:cNvPr id="2" name="">
             <a:extLst xmlns:a="http://schemas.openxmlformats.org/drawingml/2006/main">
               <a:ext uri="{FF2B5EF4-FFF2-40B4-BE49-F238E27FC236}">
-                <a16:creationId xmlns:a16="http://schemas.microsoft.com/office/drawing/2014/main" id="{DA37B206-0EBF-4A71-9B24-EBE68A988C66}"/>
+                <a16:creationId xmlns:a16="http://schemas.microsoft.com/office/drawing/2014/main" id="{DECC1C83-948D-4E1B-B861-3FFD8DB073F3}"/>
               </a:ext>
             </a:extLst>
           </p:cNvPr>
@@ -6907,7 +6907,7 @@
           <p:cNvPr id="3" name="">
             <a:extLst xmlns:a="http://schemas.openxmlformats.org/drawingml/2006/main">
               <a:ext uri="{FF2B5EF4-FFF2-40B4-BE49-F238E27FC236}">
-                <a16:creationId xmlns:a16="http://schemas.microsoft.com/office/drawing/2014/main" id="{B1BA7B54-A298-47D3-B36E-0BBEBA30E628}"/>
+                <a16:creationId xmlns:a16="http://schemas.microsoft.com/office/drawing/2014/main" id="{D4144EFB-9609-4B11-8038-88C6BF24954A}"/>
               </a:ext>
             </a:extLst>
           </p:cNvPr>
@@ -6939,7 +6939,7 @@
           <p:cNvPr id="4" name="">
             <a:extLst xmlns:a="http://schemas.openxmlformats.org/drawingml/2006/main">
               <a:ext uri="{FF2B5EF4-FFF2-40B4-BE49-F238E27FC236}">
-                <a16:creationId xmlns:a16="http://schemas.microsoft.com/office/drawing/2014/main" id="{9ED0FA18-0203-4B5B-B9D0-19B1195DF037}"/>
+                <a16:creationId xmlns:a16="http://schemas.microsoft.com/office/drawing/2014/main" id="{F7D9BA5E-4A80-4788-A86E-374AFF4E1D5A}"/>
               </a:ext>
             </a:extLst>
           </p:cNvPr>
@@ -6996,7 +6996,7 @@
           <p:cNvPr id="5" name="">
             <a:extLst xmlns:a="http://schemas.openxmlformats.org/drawingml/2006/main">
               <a:ext uri="{FF2B5EF4-FFF2-40B4-BE49-F238E27FC236}">
-                <a16:creationId xmlns:a16="http://schemas.microsoft.com/office/drawing/2014/main" id="{9B6FC987-44A2-483E-9CDB-80287DBCBE16}"/>
+                <a16:creationId xmlns:a16="http://schemas.microsoft.com/office/drawing/2014/main" id="{1146D25C-C8C1-4949-9D39-7E99DE028169}"/>
               </a:ext>
             </a:extLst>
           </p:cNvPr>
@@ -7053,7 +7053,7 @@
           <p:cNvPr id="6" name="">
             <a:extLst xmlns:a="http://schemas.openxmlformats.org/drawingml/2006/main">
               <a:ext uri="{FF2B5EF4-FFF2-40B4-BE49-F238E27FC236}">
-                <a16:creationId xmlns:a16="http://schemas.microsoft.com/office/drawing/2014/main" id="{07EF96A9-8214-4AF5-A6DA-931042555E62}"/>
+                <a16:creationId xmlns:a16="http://schemas.microsoft.com/office/drawing/2014/main" id="{0D238C79-D316-4845-8782-60BA47905FE7}"/>
               </a:ext>
             </a:extLst>
           </p:cNvPr>
@@ -7110,7 +7110,7 @@
           <p:cNvPr id="7" name="">
             <a:extLst xmlns:a="http://schemas.openxmlformats.org/drawingml/2006/main">
               <a:ext uri="{FF2B5EF4-FFF2-40B4-BE49-F238E27FC236}">
-                <a16:creationId xmlns:a16="http://schemas.microsoft.com/office/drawing/2014/main" id="{75CD3B46-B0CD-4A30-AED4-2FAE989FB285}"/>
+                <a16:creationId xmlns:a16="http://schemas.microsoft.com/office/drawing/2014/main" id="{4AAFF391-CF70-4011-9598-16044B9D071A}"/>
               </a:ext>
             </a:extLst>
           </p:cNvPr>
@@ -7142,7 +7142,7 @@
           <p:cNvPr id="8" name="">
             <a:extLst xmlns:a="http://schemas.openxmlformats.org/drawingml/2006/main">
               <a:ext uri="{FF2B5EF4-FFF2-40B4-BE49-F238E27FC236}">
-                <a16:creationId xmlns:a16="http://schemas.microsoft.com/office/drawing/2014/main" id="{CC9F2098-5447-4E4B-A41C-A897AA6B989C}"/>
+                <a16:creationId xmlns:a16="http://schemas.microsoft.com/office/drawing/2014/main" id="{BC7082EA-C791-4986-B996-AC6D4DEBDDA4}"/>
               </a:ext>
             </a:extLst>
           </p:cNvPr>
@@ -7199,7 +7199,7 @@
           <p:cNvPr id="9" name="">
             <a:extLst xmlns:a="http://schemas.openxmlformats.org/drawingml/2006/main">
               <a:ext uri="{FF2B5EF4-FFF2-40B4-BE49-F238E27FC236}">
-                <a16:creationId xmlns:a16="http://schemas.microsoft.com/office/drawing/2014/main" id="{59312257-BCB4-4ACB-9E2D-57CAAAAF4351}"/>
+                <a16:creationId xmlns:a16="http://schemas.microsoft.com/office/drawing/2014/main" id="{7759859B-9BB0-4F62-A7F4-1222B1445428}"/>
               </a:ext>
             </a:extLst>
           </p:cNvPr>
@@ -7256,7 +7256,7 @@
           <p:cNvPr id="10" name="">
             <a:extLst xmlns:a="http://schemas.openxmlformats.org/drawingml/2006/main">
               <a:ext uri="{FF2B5EF4-FFF2-40B4-BE49-F238E27FC236}">
-                <a16:creationId xmlns:a16="http://schemas.microsoft.com/office/drawing/2014/main" id="{784592E0-9563-4EC4-BD7E-790EB831BB03}"/>
+                <a16:creationId xmlns:a16="http://schemas.microsoft.com/office/drawing/2014/main" id="{2C723CFA-3E12-4A60-8260-A086F64964ED}"/>
               </a:ext>
             </a:extLst>
           </p:cNvPr>
@@ -7313,7 +7313,7 @@
           <p:cNvPr id="11" name="">
             <a:extLst xmlns:a="http://schemas.openxmlformats.org/drawingml/2006/main">
               <a:ext uri="{FF2B5EF4-FFF2-40B4-BE49-F238E27FC236}">
-                <a16:creationId xmlns:a16="http://schemas.microsoft.com/office/drawing/2014/main" id="{CC4BA8D5-9A96-4D19-BD79-FF4F422EE6C2}"/>
+                <a16:creationId xmlns:a16="http://schemas.microsoft.com/office/drawing/2014/main" id="{71997370-2D40-4E03-941F-176A6D231B54}"/>
               </a:ext>
             </a:extLst>
           </p:cNvPr>
@@ -7345,7 +7345,7 @@
           <p:cNvPr id="12" name="">
             <a:extLst xmlns:a="http://schemas.openxmlformats.org/drawingml/2006/main">
               <a:ext uri="{FF2B5EF4-FFF2-40B4-BE49-F238E27FC236}">
-                <a16:creationId xmlns:a16="http://schemas.microsoft.com/office/drawing/2014/main" id="{988694B0-9D51-4412-9D92-3FE8862FAC83}"/>
+                <a16:creationId xmlns:a16="http://schemas.microsoft.com/office/drawing/2014/main" id="{584F3E4A-DA19-4224-B23E-D51123A24AEE}"/>
               </a:ext>
             </a:extLst>
           </p:cNvPr>
@@ -7402,7 +7402,7 @@
           <p:cNvPr id="13" name="">
             <a:extLst xmlns:a="http://schemas.openxmlformats.org/drawingml/2006/main">
               <a:ext uri="{FF2B5EF4-FFF2-40B4-BE49-F238E27FC236}">
-                <a16:creationId xmlns:a16="http://schemas.microsoft.com/office/drawing/2014/main" id="{46475770-EEEE-40C5-BEE6-C2C8CD5BB62C}"/>
+                <a16:creationId xmlns:a16="http://schemas.microsoft.com/office/drawing/2014/main" id="{1411318C-EEB0-42B9-A6BF-2973C7E4E427}"/>
               </a:ext>
             </a:extLst>
           </p:cNvPr>
@@ -7459,7 +7459,7 @@
           <p:cNvPr id="14" name="">
             <a:extLst xmlns:a="http://schemas.openxmlformats.org/drawingml/2006/main">
               <a:ext uri="{FF2B5EF4-FFF2-40B4-BE49-F238E27FC236}">
-                <a16:creationId xmlns:a16="http://schemas.microsoft.com/office/drawing/2014/main" id="{A53DA301-A0F5-4465-AC39-9FCFAC6115C0}"/>
+                <a16:creationId xmlns:a16="http://schemas.microsoft.com/office/drawing/2014/main" id="{9803EE75-E6C2-4D67-8C69-2165C166EFB4}"/>
               </a:ext>
             </a:extLst>
           </p:cNvPr>
@@ -7516,7 +7516,7 @@
           <p:cNvPr id="15" name="">
             <a:extLst xmlns:a="http://schemas.openxmlformats.org/drawingml/2006/main">
               <a:ext uri="{FF2B5EF4-FFF2-40B4-BE49-F238E27FC236}">
-                <a16:creationId xmlns:a16="http://schemas.microsoft.com/office/drawing/2014/main" id="{C015D83B-3662-40FD-9EFD-7AEFE60B194A}"/>
+                <a16:creationId xmlns:a16="http://schemas.microsoft.com/office/drawing/2014/main" id="{6B311CEF-E91D-4FAC-8DB6-D12E8B73A052}"/>
               </a:ext>
             </a:extLst>
           </p:cNvPr>
@@ -7571,7 +7571,7 @@
     </p:spTree>
     <p:extLst>
       <p:ext uri="{BB962C8B-B14F-4D97-AF65-F5344CB8AC3E}">
-        <p14:creationId xmlns:p14="http://schemas.microsoft.com/office/powerpoint/2010/main" val="78824329"/>
+        <p14:creationId xmlns:p14="http://schemas.microsoft.com/office/powerpoint/2010/main" val="349682757"/>
       </p:ext>
     </p:extLst>
   </p:cSld>
@@ -7769,10 +7769,10 @@
       </p:grpSpPr>
       <p:sp>
         <p:nvSpPr>
-          <p:cNvPr id="27" name="">
-            <a:extLst xmlns:a="http://schemas.openxmlformats.org/drawingml/2006/main">
-              <a:ext uri="{FF2B5EF4-FFF2-40B4-BE49-F238E27FC236}">
-                <a16:creationId xmlns:a16="http://schemas.microsoft.com/office/drawing/2014/main" id="{BCDFB5DE-1B85-4125-BDD2-D5AE54805277}"/>
+          <p:cNvPr id="26" name="">
+            <a:extLst xmlns:a="http://schemas.openxmlformats.org/drawingml/2006/main">
+              <a:ext uri="{FF2B5EF4-FFF2-40B4-BE49-F238E27FC236}">
+                <a16:creationId xmlns:a16="http://schemas.microsoft.com/office/drawing/2014/main" id="{042DFFCF-19B7-4BD3-B481-BA5DEC8840DB}"/>
               </a:ext>
             </a:extLst>
           </p:cNvPr>
@@ -7804,7 +7804,7 @@
           <p:cNvPr id="2" name="">
             <a:extLst xmlns:a="http://schemas.openxmlformats.org/drawingml/2006/main">
               <a:ext uri="{FF2B5EF4-FFF2-40B4-BE49-F238E27FC236}">
-                <a16:creationId xmlns:a16="http://schemas.microsoft.com/office/drawing/2014/main" id="{4E512F3C-B21E-49F8-9E57-6DE235B0367B}"/>
+                <a16:creationId xmlns:a16="http://schemas.microsoft.com/office/drawing/2014/main" id="{3FA5AAB6-B4DC-4D08-9C85-37C999B1B80C}"/>
               </a:ext>
             </a:extLst>
           </p:cNvPr>
@@ -7861,7 +7861,7 @@
           <p:cNvPr id="3" name="">
             <a:extLst xmlns:a="http://schemas.openxmlformats.org/drawingml/2006/main">
               <a:ext uri="{FF2B5EF4-FFF2-40B4-BE49-F238E27FC236}">
-                <a16:creationId xmlns:a16="http://schemas.microsoft.com/office/drawing/2014/main" id="{4E4CC575-0A58-415E-BA43-BE12C05EB5A2}"/>
+                <a16:creationId xmlns:a16="http://schemas.microsoft.com/office/drawing/2014/main" id="{25D0A74C-CD4F-4B04-B69B-3FE60D6F3900}"/>
               </a:ext>
             </a:extLst>
           </p:cNvPr>
@@ -7893,7 +7893,7 @@
           <p:cNvPr id="4" name="">
             <a:extLst xmlns:a="http://schemas.openxmlformats.org/drawingml/2006/main">
               <a:ext uri="{FF2B5EF4-FFF2-40B4-BE49-F238E27FC236}">
-                <a16:creationId xmlns:a16="http://schemas.microsoft.com/office/drawing/2014/main" id="{A22B9658-D9C6-4845-8EAA-D7C9651B26CD}"/>
+                <a16:creationId xmlns:a16="http://schemas.microsoft.com/office/drawing/2014/main" id="{DAE1CED7-07C9-43C8-8FA9-965B84072FEE}"/>
               </a:ext>
             </a:extLst>
           </p:cNvPr>
@@ -7950,7 +7950,7 @@
           <p:cNvPr id="5" name="">
             <a:extLst xmlns:a="http://schemas.openxmlformats.org/drawingml/2006/main">
               <a:ext uri="{FF2B5EF4-FFF2-40B4-BE49-F238E27FC236}">
-                <a16:creationId xmlns:a16="http://schemas.microsoft.com/office/drawing/2014/main" id="{EE19F8FD-F5D2-4EE5-A848-BF54AF7DAF6D}"/>
+                <a16:creationId xmlns:a16="http://schemas.microsoft.com/office/drawing/2014/main" id="{9BEEBE9A-1F26-4299-9C61-6563CBEB4037}"/>
               </a:ext>
             </a:extLst>
           </p:cNvPr>
@@ -8007,7 +8007,7 @@
           <p:cNvPr id="6" name="">
             <a:extLst xmlns:a="http://schemas.openxmlformats.org/drawingml/2006/main">
               <a:ext uri="{FF2B5EF4-FFF2-40B4-BE49-F238E27FC236}">
-                <a16:creationId xmlns:a16="http://schemas.microsoft.com/office/drawing/2014/main" id="{AEE82263-9BEC-4306-8AF7-E6D4A4AC2ECF}"/>
+                <a16:creationId xmlns:a16="http://schemas.microsoft.com/office/drawing/2014/main" id="{641988B8-2567-46F0-9C56-9DCF61194CE5}"/>
               </a:ext>
             </a:extLst>
           </p:cNvPr>
@@ -8064,7 +8064,7 @@
           <p:cNvPr id="7" name="">
             <a:extLst xmlns:a="http://schemas.openxmlformats.org/drawingml/2006/main">
               <a:ext uri="{FF2B5EF4-FFF2-40B4-BE49-F238E27FC236}">
-                <a16:creationId xmlns:a16="http://schemas.microsoft.com/office/drawing/2014/main" id="{3075B83D-8F36-4AE4-B93D-3598C1F7027B}"/>
+                <a16:creationId xmlns:a16="http://schemas.microsoft.com/office/drawing/2014/main" id="{BBC33CE4-A96E-4BDF-9891-C5B4EB10C771}"/>
               </a:ext>
             </a:extLst>
           </p:cNvPr>
@@ -8096,7 +8096,7 @@
           <p:cNvPr id="8" name="">
             <a:extLst xmlns:a="http://schemas.openxmlformats.org/drawingml/2006/main">
               <a:ext uri="{FF2B5EF4-FFF2-40B4-BE49-F238E27FC236}">
-                <a16:creationId xmlns:a16="http://schemas.microsoft.com/office/drawing/2014/main" id="{49106E61-9DA5-4FC5-A6F0-6C86393DDC39}"/>
+                <a16:creationId xmlns:a16="http://schemas.microsoft.com/office/drawing/2014/main" id="{9AEC4E2B-9699-464D-8B81-0A3DC1DFD138}"/>
               </a:ext>
             </a:extLst>
           </p:cNvPr>
@@ -8153,7 +8153,7 @@
           <p:cNvPr id="9" name="">
             <a:extLst xmlns:a="http://schemas.openxmlformats.org/drawingml/2006/main">
               <a:ext uri="{FF2B5EF4-FFF2-40B4-BE49-F238E27FC236}">
-                <a16:creationId xmlns:a16="http://schemas.microsoft.com/office/drawing/2014/main" id="{687732D8-AA97-42CA-B3C1-4E381FA9F3D4}"/>
+                <a16:creationId xmlns:a16="http://schemas.microsoft.com/office/drawing/2014/main" id="{69D32676-7083-42B0-9386-CCF9C4D4AEC2}"/>
               </a:ext>
             </a:extLst>
           </p:cNvPr>
@@ -8210,19 +8210,19 @@
           <p:cNvPr id="10" name="">
             <a:extLst xmlns:a="http://schemas.openxmlformats.org/drawingml/2006/main">
               <a:ext uri="{FF2B5EF4-FFF2-40B4-BE49-F238E27FC236}">
-                <a16:creationId xmlns:a16="http://schemas.microsoft.com/office/drawing/2014/main" id="{242710D7-FF5F-4638-9366-F3227D89CCAF}"/>
-              </a:ext>
-            </a:extLst>
-          </p:cNvPr>
-          <p:cNvSpPr>
-            <a:spLocks xmlns:a="http://schemas.openxmlformats.org/drawingml/2006/main" noGrp="1"/>
-          </p:cNvSpPr>
-          <p:nvPr/>
-        </p:nvSpPr>
-        <p:spPr>
-          <a:xfrm xmlns:a="http://schemas.openxmlformats.org/drawingml/2006/main">
-            <a:off x="914400" y="1257300"/>
-            <a:ext cx="10363200" cy="781050"/>
+                <a16:creationId xmlns:a16="http://schemas.microsoft.com/office/drawing/2014/main" id="{2AF0C852-9615-4CB9-ABE6-45B4D730AA89}"/>
+              </a:ext>
+            </a:extLst>
+          </p:cNvPr>
+          <p:cNvSpPr>
+            <a:spLocks xmlns:a="http://schemas.openxmlformats.org/drawingml/2006/main" noGrp="1"/>
+          </p:cNvSpPr>
+          <p:nvPr/>
+        </p:nvSpPr>
+        <p:spPr>
+          <a:xfrm xmlns:a="http://schemas.openxmlformats.org/drawingml/2006/main">
+            <a:off x="857250" y="1219200"/>
+            <a:ext cx="10477500" cy="742950"/>
           </a:xfrm>
           <a:prstGeom xmlns:a="http://schemas.openxmlformats.org/drawingml/2006/main" prst="rect">
             <a:avLst/>
@@ -8239,7 +8239,7 @@
           <a:lstStyle xmlns:a="http://schemas.openxmlformats.org/drawingml/2006/main"/>
           <a:p xmlns:a="http://schemas.openxmlformats.org/drawingml/2006/main">
             <a:pPr algn="ctr">
-              <a:defRPr sz="2175" b="1">
+              <a:defRPr sz="2100" b="1">
                 <a:solidFill>
                   <a:srgbClr val="17253A"/>
                 </a:solidFill>
@@ -8249,7 +8249,7 @@
               </a:defRPr>
             </a:pPr>
             <a:r>
-              <a:rPr sz="2175" b="1">
+              <a:rPr sz="2100" b="1">
                 <a:solidFill>
                   <a:srgbClr val="17253A"/>
                 </a:solidFill>
@@ -8267,29 +8267,173 @@
           <p:cNvPr id="11" name="">
             <a:extLst xmlns:a="http://schemas.openxmlformats.org/drawingml/2006/main">
               <a:ext uri="{FF2B5EF4-FFF2-40B4-BE49-F238E27FC236}">
-                <a16:creationId xmlns:a16="http://schemas.microsoft.com/office/drawing/2014/main" id="{DF7BD6FD-1D29-4404-BF22-86DD4BC05BFF}"/>
-              </a:ext>
-            </a:extLst>
-          </p:cNvPr>
-          <p:cNvSpPr>
-            <a:spLocks xmlns:a="http://schemas.openxmlformats.org/drawingml/2006/main" noGrp="1"/>
-          </p:cNvSpPr>
-          <p:nvPr/>
-        </p:nvSpPr>
-        <p:spPr>
-          <a:xfrm xmlns:a="http://schemas.openxmlformats.org/drawingml/2006/main">
-            <a:off x="781050" y="2171700"/>
-            <a:ext cx="10629900" cy="609600"/>
-          </a:xfrm>
-          <a:prstGeom xmlns:a="http://schemas.openxmlformats.org/drawingml/2006/main" prst="roundRect">
-            <a:avLst>
-              <a:gd name="adj" fmla="val 12500"/>
-            </a:avLst>
+                <a16:creationId xmlns:a16="http://schemas.microsoft.com/office/drawing/2014/main" id="{272E2EC9-F37C-4DF6-B16A-FCD0BEA0FEC5}"/>
+              </a:ext>
+            </a:extLst>
+          </p:cNvPr>
+          <p:cNvSpPr>
+            <a:spLocks xmlns:a="http://schemas.openxmlformats.org/drawingml/2006/main" noGrp="1"/>
+          </p:cNvSpPr>
+          <p:nvPr/>
+        </p:nvSpPr>
+        <p:spPr>
+          <a:xfrm xmlns:a="http://schemas.openxmlformats.org/drawingml/2006/main">
+            <a:off x="971550" y="2124075"/>
+            <a:ext cx="38100" cy="3524250"/>
+          </a:xfrm>
+          <a:prstGeom xmlns:a="http://schemas.openxmlformats.org/drawingml/2006/main" prst="rect">
+            <a:avLst/>
           </a:prstGeom>
           <a:solidFill xmlns:a="http://schemas.openxmlformats.org/drawingml/2006/main">
-            <a:srgbClr val="E7F1F1"/>
+            <a:srgbClr val="2C6E73"/>
           </a:solidFill>
-          <a:ln xmlns:a="http://schemas.openxmlformats.org/drawingml/2006/main" w="11430">
+          <a:ln xmlns:a="http://schemas.openxmlformats.org/drawingml/2006/main" w="0">
+            <a:solidFill>
+              <a:srgbClr val="2C6E73"/>
+            </a:solidFill>
+          </a:ln>
+        </p:spPr>
+      </p:sp>
+      <p:sp>
+        <p:nvSpPr>
+          <p:cNvPr id="12" name="">
+            <a:extLst xmlns:a="http://schemas.openxmlformats.org/drawingml/2006/main">
+              <a:ext uri="{FF2B5EF4-FFF2-40B4-BE49-F238E27FC236}">
+                <a16:creationId xmlns:a16="http://schemas.microsoft.com/office/drawing/2014/main" id="{675935F7-23B0-4F21-BF55-E42EEEAD9822}"/>
+              </a:ext>
+            </a:extLst>
+          </p:cNvPr>
+          <p:cNvSpPr>
+            <a:spLocks xmlns:a="http://schemas.openxmlformats.org/drawingml/2006/main" noGrp="1"/>
+          </p:cNvSpPr>
+          <p:nvPr/>
+        </p:nvSpPr>
+        <p:spPr>
+          <a:xfrm xmlns:a="http://schemas.openxmlformats.org/drawingml/2006/main">
+            <a:off x="1162050" y="2200275"/>
+            <a:ext cx="400050" cy="400050"/>
+          </a:xfrm>
+          <a:prstGeom xmlns:a="http://schemas.openxmlformats.org/drawingml/2006/main" prst="rect">
+            <a:avLst/>
+          </a:prstGeom>
+          <a:noFill xmlns:a="http://schemas.openxmlformats.org/drawingml/2006/main"/>
+          <a:ln xmlns:a="http://schemas.openxmlformats.org/drawingml/2006/main" w="0">
+            <a:noFill/>
+          </a:ln>
+        </p:spPr>
+        <p:txBody>
+          <a:bodyPr xmlns:a="http://schemas.openxmlformats.org/drawingml/2006/main" anchor="ctr">
+            <a:normAutofit fontScale="100000"/>
+          </a:bodyPr>
+          <a:lstStyle xmlns:a="http://schemas.openxmlformats.org/drawingml/2006/main"/>
+          <a:p xmlns:a="http://schemas.openxmlformats.org/drawingml/2006/main">
+            <a:pPr algn="ctr">
+              <a:defRPr sz="1125" b="1">
+                <a:solidFill>
+                  <a:srgbClr val="2C6E73"/>
+                </a:solidFill>
+                <a:latin typeface="Arial"/>
+                <a:ea typeface="Arial"/>
+                <a:cs typeface="Arial"/>
+              </a:defRPr>
+            </a:pPr>
+            <a:r>
+              <a:rPr sz="1125" b="1">
+                <a:solidFill>
+                  <a:srgbClr val="2C6E73"/>
+                </a:solidFill>
+                <a:latin typeface="Arial"/>
+                <a:ea typeface="Arial"/>
+                <a:cs typeface="Arial"/>
+              </a:rPr>
+              <a:t>1</a:t>
+            </a:r>
+          </a:p>
+        </p:txBody>
+      </p:sp>
+      <p:sp>
+        <p:nvSpPr>
+          <p:cNvPr id="13" name="">
+            <a:extLst xmlns:a="http://schemas.openxmlformats.org/drawingml/2006/main">
+              <a:ext uri="{FF2B5EF4-FFF2-40B4-BE49-F238E27FC236}">
+                <a16:creationId xmlns:a16="http://schemas.microsoft.com/office/drawing/2014/main" id="{120E9AEF-8624-418E-94AF-EDE0C2302AF1}"/>
+              </a:ext>
+            </a:extLst>
+          </p:cNvPr>
+          <p:cNvSpPr>
+            <a:spLocks xmlns:a="http://schemas.openxmlformats.org/drawingml/2006/main" noGrp="1"/>
+          </p:cNvSpPr>
+          <p:nvPr/>
+        </p:nvSpPr>
+        <p:spPr>
+          <a:xfrm xmlns:a="http://schemas.openxmlformats.org/drawingml/2006/main">
+            <a:off x="1714500" y="2114550"/>
+            <a:ext cx="9525000" cy="638175"/>
+          </a:xfrm>
+          <a:prstGeom xmlns:a="http://schemas.openxmlformats.org/drawingml/2006/main" prst="rect">
+            <a:avLst/>
+          </a:prstGeom>
+          <a:noFill xmlns:a="http://schemas.openxmlformats.org/drawingml/2006/main"/>
+          <a:ln xmlns:a="http://schemas.openxmlformats.org/drawingml/2006/main" w="0">
+            <a:noFill/>
+          </a:ln>
+        </p:spPr>
+        <p:txBody>
+          <a:bodyPr xmlns:a="http://schemas.openxmlformats.org/drawingml/2006/main" anchor="ctr">
+            <a:normAutofit fontScale="100000"/>
+          </a:bodyPr>
+          <a:lstStyle xmlns:a="http://schemas.openxmlformats.org/drawingml/2006/main"/>
+          <a:p xmlns:a="http://schemas.openxmlformats.org/drawingml/2006/main">
+            <a:pPr algn="l">
+              <a:defRPr sz="1575" b="0">
+                <a:solidFill>
+                  <a:srgbClr val="17253A"/>
+                </a:solidFill>
+                <a:latin typeface="Arial"/>
+                <a:ea typeface="Arial"/>
+                <a:cs typeface="Arial"/>
+              </a:defRPr>
+            </a:pPr>
+            <a:r>
+              <a:rPr sz="1575" b="0">
+                <a:solidFill>
+                  <a:srgbClr val="17253A"/>
+                </a:solidFill>
+                <a:latin typeface="Arial"/>
+                <a:ea typeface="Arial"/>
+                <a:cs typeface="Arial"/>
+              </a:rPr>
+              <a:t>326 × 45</a:t>
+            </a:r>
+          </a:p>
+        </p:txBody>
+      </p:sp>
+      <p:sp>
+        <p:nvSpPr>
+          <p:cNvPr id="14" name="">
+            <a:extLst xmlns:a="http://schemas.openxmlformats.org/drawingml/2006/main">
+              <a:ext uri="{FF2B5EF4-FFF2-40B4-BE49-F238E27FC236}">
+                <a16:creationId xmlns:a16="http://schemas.microsoft.com/office/drawing/2014/main" id="{104C11BA-C834-4AB1-A021-7342C2BE0E40}"/>
+              </a:ext>
+            </a:extLst>
+          </p:cNvPr>
+          <p:cNvSpPr>
+            <a:spLocks xmlns:a="http://schemas.openxmlformats.org/drawingml/2006/main" noGrp="1"/>
+          </p:cNvSpPr>
+          <p:nvPr/>
+        </p:nvSpPr>
+        <p:spPr>
+          <a:xfrm xmlns:a="http://schemas.openxmlformats.org/drawingml/2006/main">
+            <a:off x="1714500" y="2771775"/>
+            <a:ext cx="9334500" cy="9525"/>
+          </a:xfrm>
+          <a:prstGeom xmlns:a="http://schemas.openxmlformats.org/drawingml/2006/main" prst="rect">
+            <a:avLst/>
+          </a:prstGeom>
+          <a:solidFill xmlns:a="http://schemas.openxmlformats.org/drawingml/2006/main">
+            <a:srgbClr val="D9E0E6"/>
+          </a:solidFill>
+          <a:ln xmlns:a="http://schemas.openxmlformats.org/drawingml/2006/main" w="0">
             <a:solidFill>
               <a:srgbClr val="D9E0E6"/>
             </a:solidFill>
@@ -8298,22 +8442,22 @@
       </p:sp>
       <p:sp>
         <p:nvSpPr>
-          <p:cNvPr id="12" name="">
-            <a:extLst xmlns:a="http://schemas.openxmlformats.org/drawingml/2006/main">
-              <a:ext uri="{FF2B5EF4-FFF2-40B4-BE49-F238E27FC236}">
-                <a16:creationId xmlns:a16="http://schemas.microsoft.com/office/drawing/2014/main" id="{3FCDDCC9-98F5-460B-B351-504B2116C209}"/>
-              </a:ext>
-            </a:extLst>
-          </p:cNvPr>
-          <p:cNvSpPr>
-            <a:spLocks xmlns:a="http://schemas.openxmlformats.org/drawingml/2006/main" noGrp="1"/>
-          </p:cNvSpPr>
-          <p:nvPr/>
-        </p:nvSpPr>
-        <p:spPr>
-          <a:xfrm xmlns:a="http://schemas.openxmlformats.org/drawingml/2006/main">
-            <a:off x="952500" y="2266950"/>
-            <a:ext cx="3238500" cy="419100"/>
+          <p:cNvPr id="15" name="">
+            <a:extLst xmlns:a="http://schemas.openxmlformats.org/drawingml/2006/main">
+              <a:ext uri="{FF2B5EF4-FFF2-40B4-BE49-F238E27FC236}">
+                <a16:creationId xmlns:a16="http://schemas.microsoft.com/office/drawing/2014/main" id="{C7ED72DF-2031-41CE-8442-6732FCD8B9B7}"/>
+              </a:ext>
+            </a:extLst>
+          </p:cNvPr>
+          <p:cNvSpPr>
+            <a:spLocks xmlns:a="http://schemas.openxmlformats.org/drawingml/2006/main" noGrp="1"/>
+          </p:cNvSpPr>
+          <p:nvPr/>
+        </p:nvSpPr>
+        <p:spPr>
+          <a:xfrm xmlns:a="http://schemas.openxmlformats.org/drawingml/2006/main">
+            <a:off x="1162050" y="2905125"/>
+            <a:ext cx="400050" cy="400050"/>
           </a:xfrm>
           <a:prstGeom xmlns:a="http://schemas.openxmlformats.org/drawingml/2006/main" prst="rect">
             <a:avLst/>
@@ -8348,29 +8492,29 @@
                 <a:ea typeface="Arial"/>
                 <a:cs typeface="Arial"/>
               </a:rPr>
-              <a:t>Ones row: 326 × 5 = 1630</a:t>
-            </a:r>
-          </a:p>
-        </p:txBody>
-      </p:sp>
-      <p:sp>
-        <p:nvSpPr>
-          <p:cNvPr id="13" name="">
-            <a:extLst xmlns:a="http://schemas.openxmlformats.org/drawingml/2006/main">
-              <a:ext uri="{FF2B5EF4-FFF2-40B4-BE49-F238E27FC236}">
-                <a16:creationId xmlns:a16="http://schemas.microsoft.com/office/drawing/2014/main" id="{C03E2C5C-CBB7-4F49-878A-E9B37DDD5ECD}"/>
-              </a:ext>
-            </a:extLst>
-          </p:cNvPr>
-          <p:cNvSpPr>
-            <a:spLocks xmlns:a="http://schemas.openxmlformats.org/drawingml/2006/main" noGrp="1"/>
-          </p:cNvSpPr>
-          <p:nvPr/>
-        </p:nvSpPr>
-        <p:spPr>
-          <a:xfrm xmlns:a="http://schemas.openxmlformats.org/drawingml/2006/main">
-            <a:off x="4381500" y="2266950"/>
-            <a:ext cx="3238500" cy="419100"/>
+              <a:t>2</a:t>
+            </a:r>
+          </a:p>
+        </p:txBody>
+      </p:sp>
+      <p:sp>
+        <p:nvSpPr>
+          <p:cNvPr id="16" name="">
+            <a:extLst xmlns:a="http://schemas.openxmlformats.org/drawingml/2006/main">
+              <a:ext uri="{FF2B5EF4-FFF2-40B4-BE49-F238E27FC236}">
+                <a16:creationId xmlns:a16="http://schemas.microsoft.com/office/drawing/2014/main" id="{97358061-5AD3-468F-9985-116FE78223A1}"/>
+              </a:ext>
+            </a:extLst>
+          </p:cNvPr>
+          <p:cNvSpPr>
+            <a:spLocks xmlns:a="http://schemas.openxmlformats.org/drawingml/2006/main" noGrp="1"/>
+          </p:cNvSpPr>
+          <p:nvPr/>
+        </p:nvSpPr>
+        <p:spPr>
+          <a:xfrm xmlns:a="http://schemas.openxmlformats.org/drawingml/2006/main">
+            <a:off x="1714500" y="2819400"/>
+            <a:ext cx="9525000" cy="638175"/>
           </a:xfrm>
           <a:prstGeom xmlns:a="http://schemas.openxmlformats.org/drawingml/2006/main" prst="rect">
             <a:avLst/>
@@ -8386,10 +8530,10 @@
           </a:bodyPr>
           <a:lstStyle xmlns:a="http://schemas.openxmlformats.org/drawingml/2006/main"/>
           <a:p xmlns:a="http://schemas.openxmlformats.org/drawingml/2006/main">
-            <a:pPr algn="ctr">
-              <a:defRPr sz="1125" b="1">
-                <a:solidFill>
-                  <a:srgbClr val="2C6E73"/>
+            <a:pPr algn="l">
+              <a:defRPr sz="1575" b="0">
+                <a:solidFill>
+                  <a:srgbClr val="17253A"/>
                 </a:solidFill>
                 <a:latin typeface="Arial"/>
                 <a:ea typeface="Arial"/>
@@ -8397,124 +8541,69 @@
               </a:defRPr>
             </a:pPr>
             <a:r>
-              <a:rPr sz="1125" b="1">
-                <a:solidFill>
-                  <a:srgbClr val="2C6E73"/>
+              <a:rPr sz="1575" b="0">
+                <a:solidFill>
+                  <a:srgbClr val="17253A"/>
                 </a:solidFill>
                 <a:latin typeface="Arial"/>
                 <a:ea typeface="Arial"/>
                 <a:cs typeface="Arial"/>
               </a:rPr>
-              <a:t>Tens row: 326 × 40 = 13040</a:t>
-            </a:r>
-          </a:p>
-        </p:txBody>
-      </p:sp>
-      <p:sp>
-        <p:nvSpPr>
-          <p:cNvPr id="14" name="">
-            <a:extLst xmlns:a="http://schemas.openxmlformats.org/drawingml/2006/main">
-              <a:ext uri="{FF2B5EF4-FFF2-40B4-BE49-F238E27FC236}">
-                <a16:creationId xmlns:a16="http://schemas.microsoft.com/office/drawing/2014/main" id="{5784D197-B955-4B26-9E16-C071BBE0EAE4}"/>
-              </a:ext>
-            </a:extLst>
-          </p:cNvPr>
-          <p:cNvSpPr>
-            <a:spLocks xmlns:a="http://schemas.openxmlformats.org/drawingml/2006/main" noGrp="1"/>
-          </p:cNvSpPr>
-          <p:nvPr/>
-        </p:nvSpPr>
-        <p:spPr>
-          <a:xfrm xmlns:a="http://schemas.openxmlformats.org/drawingml/2006/main">
-            <a:off x="7810500" y="2266950"/>
-            <a:ext cx="3238500" cy="419100"/>
-          </a:xfrm>
-          <a:prstGeom xmlns:a="http://schemas.openxmlformats.org/drawingml/2006/main" prst="rect">
-            <a:avLst/>
-          </a:prstGeom>
-          <a:noFill xmlns:a="http://schemas.openxmlformats.org/drawingml/2006/main"/>
-          <a:ln xmlns:a="http://schemas.openxmlformats.org/drawingml/2006/main" w="0">
-            <a:noFill/>
-          </a:ln>
-        </p:spPr>
-        <p:txBody>
-          <a:bodyPr xmlns:a="http://schemas.openxmlformats.org/drawingml/2006/main" anchor="ctr">
-            <a:normAutofit fontScale="95556"/>
-          </a:bodyPr>
-          <a:lstStyle xmlns:a="http://schemas.openxmlformats.org/drawingml/2006/main"/>
-          <a:p xmlns:a="http://schemas.openxmlformats.org/drawingml/2006/main">
-            <a:pPr algn="ctr">
-              <a:defRPr sz="1125" b="1">
-                <a:solidFill>
-                  <a:srgbClr val="2C6E73"/>
-                </a:solidFill>
-                <a:latin typeface="Arial"/>
-                <a:ea typeface="Arial"/>
-                <a:cs typeface="Arial"/>
-              </a:defRPr>
-            </a:pPr>
-            <a:r>
-              <a:rPr sz="1125" b="1">
-                <a:solidFill>
-                  <a:srgbClr val="2C6E73"/>
-                </a:solidFill>
-                <a:latin typeface="Arial"/>
-                <a:ea typeface="Arial"/>
-                <a:cs typeface="Arial"/>
-              </a:rPr>
-              <a:t>Estimate first: Estimate the product before calculating.</a:t>
-            </a:r>
-          </a:p>
-        </p:txBody>
-      </p:sp>
-      <p:sp>
-        <p:nvSpPr>
-          <p:cNvPr id="15" name="">
-            <a:extLst xmlns:a="http://schemas.openxmlformats.org/drawingml/2006/main">
-              <a:ext uri="{FF2B5EF4-FFF2-40B4-BE49-F238E27FC236}">
-                <a16:creationId xmlns:a16="http://schemas.microsoft.com/office/drawing/2014/main" id="{8EE96616-A7C0-44FA-82CE-C7FD53B7B32C}"/>
-              </a:ext>
-            </a:extLst>
-          </p:cNvPr>
-          <p:cNvSpPr>
-            <a:spLocks xmlns:a="http://schemas.openxmlformats.org/drawingml/2006/main" noGrp="1"/>
-          </p:cNvSpPr>
-          <p:nvPr/>
-        </p:nvSpPr>
-        <p:spPr>
-          <a:xfrm xmlns:a="http://schemas.openxmlformats.org/drawingml/2006/main">
-            <a:off x="1000125" y="3028950"/>
-            <a:ext cx="476250" cy="476250"/>
-          </a:xfrm>
-          <a:prstGeom xmlns:a="http://schemas.openxmlformats.org/drawingml/2006/main" prst="ellipse">
+              <a:t>326 × 5 = 1,630</a:t>
+            </a:r>
+          </a:p>
+        </p:txBody>
+      </p:sp>
+      <p:sp>
+        <p:nvSpPr>
+          <p:cNvPr id="17" name="">
+            <a:extLst xmlns:a="http://schemas.openxmlformats.org/drawingml/2006/main">
+              <a:ext uri="{FF2B5EF4-FFF2-40B4-BE49-F238E27FC236}">
+                <a16:creationId xmlns:a16="http://schemas.microsoft.com/office/drawing/2014/main" id="{3A67441C-980B-42E5-A9EB-49503FC91038}"/>
+              </a:ext>
+            </a:extLst>
+          </p:cNvPr>
+          <p:cNvSpPr>
+            <a:spLocks xmlns:a="http://schemas.openxmlformats.org/drawingml/2006/main" noGrp="1"/>
+          </p:cNvSpPr>
+          <p:nvPr/>
+        </p:nvSpPr>
+        <p:spPr>
+          <a:xfrm xmlns:a="http://schemas.openxmlformats.org/drawingml/2006/main">
+            <a:off x="1714500" y="3476625"/>
+            <a:ext cx="9334500" cy="9525"/>
+          </a:xfrm>
+          <a:prstGeom xmlns:a="http://schemas.openxmlformats.org/drawingml/2006/main" prst="rect">
             <a:avLst/>
           </a:prstGeom>
           <a:solidFill xmlns:a="http://schemas.openxmlformats.org/drawingml/2006/main">
-            <a:srgbClr val="18324A"/>
+            <a:srgbClr val="D9E0E6"/>
           </a:solidFill>
           <a:ln xmlns:a="http://schemas.openxmlformats.org/drawingml/2006/main" w="0">
-            <a:noFill/>
-          </a:ln>
-        </p:spPr>
-      </p:sp>
-      <p:sp>
-        <p:nvSpPr>
-          <p:cNvPr id="16" name="">
-            <a:extLst xmlns:a="http://schemas.openxmlformats.org/drawingml/2006/main">
-              <a:ext uri="{FF2B5EF4-FFF2-40B4-BE49-F238E27FC236}">
-                <a16:creationId xmlns:a16="http://schemas.microsoft.com/office/drawing/2014/main" id="{16828824-12A9-45E0-B0DB-7F7950D38F13}"/>
-              </a:ext>
-            </a:extLst>
-          </p:cNvPr>
-          <p:cNvSpPr>
-            <a:spLocks xmlns:a="http://schemas.openxmlformats.org/drawingml/2006/main" noGrp="1"/>
-          </p:cNvSpPr>
-          <p:nvPr/>
-        </p:nvSpPr>
-        <p:spPr>
-          <a:xfrm xmlns:a="http://schemas.openxmlformats.org/drawingml/2006/main">
-            <a:off x="1000125" y="3057525"/>
-            <a:ext cx="476250" cy="419100"/>
+            <a:solidFill>
+              <a:srgbClr val="D9E0E6"/>
+            </a:solidFill>
+          </a:ln>
+        </p:spPr>
+      </p:sp>
+      <p:sp>
+        <p:nvSpPr>
+          <p:cNvPr id="18" name="">
+            <a:extLst xmlns:a="http://schemas.openxmlformats.org/drawingml/2006/main">
+              <a:ext uri="{FF2B5EF4-FFF2-40B4-BE49-F238E27FC236}">
+                <a16:creationId xmlns:a16="http://schemas.microsoft.com/office/drawing/2014/main" id="{CE5D99E9-15ED-4699-81C4-B737B03DA9C6}"/>
+              </a:ext>
+            </a:extLst>
+          </p:cNvPr>
+          <p:cNvSpPr>
+            <a:spLocks xmlns:a="http://schemas.openxmlformats.org/drawingml/2006/main" noGrp="1"/>
+          </p:cNvSpPr>
+          <p:nvPr/>
+        </p:nvSpPr>
+        <p:spPr>
+          <a:xfrm xmlns:a="http://schemas.openxmlformats.org/drawingml/2006/main">
+            <a:off x="1162050" y="3609975"/>
+            <a:ext cx="400050" cy="400050"/>
           </a:xfrm>
           <a:prstGeom xmlns:a="http://schemas.openxmlformats.org/drawingml/2006/main" prst="rect">
             <a:avLst/>
@@ -8531,9 +8620,9 @@
           <a:lstStyle xmlns:a="http://schemas.openxmlformats.org/drawingml/2006/main"/>
           <a:p xmlns:a="http://schemas.openxmlformats.org/drawingml/2006/main">
             <a:pPr algn="ctr">
-              <a:defRPr sz="1350" b="1">
-                <a:solidFill>
-                  <a:srgbClr val="FFFFFF"/>
+              <a:defRPr sz="1125" b="1">
+                <a:solidFill>
+                  <a:srgbClr val="2C6E73"/>
                 </a:solidFill>
                 <a:latin typeface="Arial"/>
                 <a:ea typeface="Arial"/>
@@ -8541,37 +8630,37 @@
               </a:defRPr>
             </a:pPr>
             <a:r>
-              <a:rPr sz="1350" b="1">
-                <a:solidFill>
-                  <a:srgbClr val="FFFFFF"/>
+              <a:rPr sz="1125" b="1">
+                <a:solidFill>
+                  <a:srgbClr val="2C6E73"/>
                 </a:solidFill>
                 <a:latin typeface="Arial"/>
                 <a:ea typeface="Arial"/>
                 <a:cs typeface="Arial"/>
               </a:rPr>
-              <a:t>1</a:t>
-            </a:r>
-          </a:p>
-        </p:txBody>
-      </p:sp>
-      <p:sp>
-        <p:nvSpPr>
-          <p:cNvPr id="17" name="">
-            <a:extLst xmlns:a="http://schemas.openxmlformats.org/drawingml/2006/main">
-              <a:ext uri="{FF2B5EF4-FFF2-40B4-BE49-F238E27FC236}">
-                <a16:creationId xmlns:a16="http://schemas.microsoft.com/office/drawing/2014/main" id="{249B1352-AA4C-4F6F-A4BF-359352141138}"/>
-              </a:ext>
-            </a:extLst>
-          </p:cNvPr>
-          <p:cNvSpPr>
-            <a:spLocks xmlns:a="http://schemas.openxmlformats.org/drawingml/2006/main" noGrp="1"/>
-          </p:cNvSpPr>
-          <p:nvPr/>
-        </p:nvSpPr>
-        <p:spPr>
-          <a:xfrm xmlns:a="http://schemas.openxmlformats.org/drawingml/2006/main">
-            <a:off x="1714500" y="2962275"/>
-            <a:ext cx="9429750" cy="609600"/>
+              <a:t>3</a:t>
+            </a:r>
+          </a:p>
+        </p:txBody>
+      </p:sp>
+      <p:sp>
+        <p:nvSpPr>
+          <p:cNvPr id="19" name="">
+            <a:extLst xmlns:a="http://schemas.openxmlformats.org/drawingml/2006/main">
+              <a:ext uri="{FF2B5EF4-FFF2-40B4-BE49-F238E27FC236}">
+                <a16:creationId xmlns:a16="http://schemas.microsoft.com/office/drawing/2014/main" id="{159DD884-3A95-4807-9CF3-F47598CB10D1}"/>
+              </a:ext>
+            </a:extLst>
+          </p:cNvPr>
+          <p:cNvSpPr>
+            <a:spLocks xmlns:a="http://schemas.openxmlformats.org/drawingml/2006/main" noGrp="1"/>
+          </p:cNvSpPr>
+          <p:nvPr/>
+        </p:nvSpPr>
+        <p:spPr>
+          <a:xfrm xmlns:a="http://schemas.openxmlformats.org/drawingml/2006/main">
+            <a:off x="1714500" y="3524250"/>
+            <a:ext cx="9525000" cy="638175"/>
           </a:xfrm>
           <a:prstGeom xmlns:a="http://schemas.openxmlformats.org/drawingml/2006/main" prst="rect">
             <a:avLst/>
@@ -8588,7 +8677,7 @@
           <a:lstStyle xmlns:a="http://schemas.openxmlformats.org/drawingml/2006/main"/>
           <a:p xmlns:a="http://schemas.openxmlformats.org/drawingml/2006/main">
             <a:pPr algn="l">
-              <a:defRPr sz="1500" b="0">
+              <a:defRPr sz="1575" b="0">
                 <a:solidFill>
                   <a:srgbClr val="17253A"/>
                 </a:solidFill>
@@ -8598,7 +8687,7 @@
               </a:defRPr>
             </a:pPr>
             <a:r>
-              <a:rPr sz="1500" b="0">
+              <a:rPr sz="1575" b="0">
                 <a:solidFill>
                   <a:srgbClr val="17253A"/>
                 </a:solidFill>
@@ -8606,59 +8695,61 @@
                 <a:ea typeface="Arial"/>
                 <a:cs typeface="Arial"/>
               </a:rPr>
-              <a:t>Write 326 × 45 in place-value columns.</a:t>
-            </a:r>
-          </a:p>
-        </p:txBody>
-      </p:sp>
-      <p:sp>
-        <p:nvSpPr>
-          <p:cNvPr id="18" name="">
-            <a:extLst xmlns:a="http://schemas.openxmlformats.org/drawingml/2006/main">
-              <a:ext uri="{FF2B5EF4-FFF2-40B4-BE49-F238E27FC236}">
-                <a16:creationId xmlns:a16="http://schemas.microsoft.com/office/drawing/2014/main" id="{46197F3E-5855-4A15-B57A-F4363FEC4231}"/>
-              </a:ext>
-            </a:extLst>
-          </p:cNvPr>
-          <p:cNvSpPr>
-            <a:spLocks xmlns:a="http://schemas.openxmlformats.org/drawingml/2006/main" noGrp="1"/>
-          </p:cNvSpPr>
-          <p:nvPr/>
-        </p:nvSpPr>
-        <p:spPr>
-          <a:xfrm xmlns:a="http://schemas.openxmlformats.org/drawingml/2006/main">
-            <a:off x="1000125" y="3771900"/>
-            <a:ext cx="476250" cy="476250"/>
-          </a:xfrm>
-          <a:prstGeom xmlns:a="http://schemas.openxmlformats.org/drawingml/2006/main" prst="ellipse">
+              <a:t>326 × 40 = 13,040</a:t>
+            </a:r>
+          </a:p>
+        </p:txBody>
+      </p:sp>
+      <p:sp>
+        <p:nvSpPr>
+          <p:cNvPr id="20" name="">
+            <a:extLst xmlns:a="http://schemas.openxmlformats.org/drawingml/2006/main">
+              <a:ext uri="{FF2B5EF4-FFF2-40B4-BE49-F238E27FC236}">
+                <a16:creationId xmlns:a16="http://schemas.microsoft.com/office/drawing/2014/main" id="{B2025FC1-FD31-4395-8440-A5E0AC3CC42F}"/>
+              </a:ext>
+            </a:extLst>
+          </p:cNvPr>
+          <p:cNvSpPr>
+            <a:spLocks xmlns:a="http://schemas.openxmlformats.org/drawingml/2006/main" noGrp="1"/>
+          </p:cNvSpPr>
+          <p:nvPr/>
+        </p:nvSpPr>
+        <p:spPr>
+          <a:xfrm xmlns:a="http://schemas.openxmlformats.org/drawingml/2006/main">
+            <a:off x="1714500" y="4181475"/>
+            <a:ext cx="9334500" cy="9525"/>
+          </a:xfrm>
+          <a:prstGeom xmlns:a="http://schemas.openxmlformats.org/drawingml/2006/main" prst="rect">
             <a:avLst/>
           </a:prstGeom>
           <a:solidFill xmlns:a="http://schemas.openxmlformats.org/drawingml/2006/main">
-            <a:srgbClr val="2C6E73"/>
+            <a:srgbClr val="D9E0E6"/>
           </a:solidFill>
           <a:ln xmlns:a="http://schemas.openxmlformats.org/drawingml/2006/main" w="0">
-            <a:noFill/>
-          </a:ln>
-        </p:spPr>
-      </p:sp>
-      <p:sp>
-        <p:nvSpPr>
-          <p:cNvPr id="19" name="">
-            <a:extLst xmlns:a="http://schemas.openxmlformats.org/drawingml/2006/main">
-              <a:ext uri="{FF2B5EF4-FFF2-40B4-BE49-F238E27FC236}">
-                <a16:creationId xmlns:a16="http://schemas.microsoft.com/office/drawing/2014/main" id="{DE755FD8-AE44-4831-AAD3-C77BE40B08F9}"/>
-              </a:ext>
-            </a:extLst>
-          </p:cNvPr>
-          <p:cNvSpPr>
-            <a:spLocks xmlns:a="http://schemas.openxmlformats.org/drawingml/2006/main" noGrp="1"/>
-          </p:cNvSpPr>
-          <p:nvPr/>
-        </p:nvSpPr>
-        <p:spPr>
-          <a:xfrm xmlns:a="http://schemas.openxmlformats.org/drawingml/2006/main">
-            <a:off x="1000125" y="3800475"/>
-            <a:ext cx="476250" cy="419100"/>
+            <a:solidFill>
+              <a:srgbClr val="D9E0E6"/>
+            </a:solidFill>
+          </a:ln>
+        </p:spPr>
+      </p:sp>
+      <p:sp>
+        <p:nvSpPr>
+          <p:cNvPr id="21" name="">
+            <a:extLst xmlns:a="http://schemas.openxmlformats.org/drawingml/2006/main">
+              <a:ext uri="{FF2B5EF4-FFF2-40B4-BE49-F238E27FC236}">
+                <a16:creationId xmlns:a16="http://schemas.microsoft.com/office/drawing/2014/main" id="{DC7318FD-0772-4B76-8BAB-8DD7B2B1999B}"/>
+              </a:ext>
+            </a:extLst>
+          </p:cNvPr>
+          <p:cNvSpPr>
+            <a:spLocks xmlns:a="http://schemas.openxmlformats.org/drawingml/2006/main" noGrp="1"/>
+          </p:cNvSpPr>
+          <p:nvPr/>
+        </p:nvSpPr>
+        <p:spPr>
+          <a:xfrm xmlns:a="http://schemas.openxmlformats.org/drawingml/2006/main">
+            <a:off x="1162050" y="4314825"/>
+            <a:ext cx="400050" cy="400050"/>
           </a:xfrm>
           <a:prstGeom xmlns:a="http://schemas.openxmlformats.org/drawingml/2006/main" prst="rect">
             <a:avLst/>
@@ -8675,9 +8766,9 @@
           <a:lstStyle xmlns:a="http://schemas.openxmlformats.org/drawingml/2006/main"/>
           <a:p xmlns:a="http://schemas.openxmlformats.org/drawingml/2006/main">
             <a:pPr algn="ctr">
-              <a:defRPr sz="1350" b="1">
-                <a:solidFill>
-                  <a:srgbClr val="FFFFFF"/>
+              <a:defRPr sz="1125" b="1">
+                <a:solidFill>
+                  <a:srgbClr val="2C6E73"/>
                 </a:solidFill>
                 <a:latin typeface="Arial"/>
                 <a:ea typeface="Arial"/>
@@ -8685,37 +8776,37 @@
               </a:defRPr>
             </a:pPr>
             <a:r>
-              <a:rPr sz="1350" b="1">
-                <a:solidFill>
-                  <a:srgbClr val="FFFFFF"/>
+              <a:rPr sz="1125" b="1">
+                <a:solidFill>
+                  <a:srgbClr val="2C6E73"/>
                 </a:solidFill>
                 <a:latin typeface="Arial"/>
                 <a:ea typeface="Arial"/>
                 <a:cs typeface="Arial"/>
               </a:rPr>
-              <a:t>2</a:t>
-            </a:r>
-          </a:p>
-        </p:txBody>
-      </p:sp>
-      <p:sp>
-        <p:nvSpPr>
-          <p:cNvPr id="20" name="">
-            <a:extLst xmlns:a="http://schemas.openxmlformats.org/drawingml/2006/main">
-              <a:ext uri="{FF2B5EF4-FFF2-40B4-BE49-F238E27FC236}">
-                <a16:creationId xmlns:a16="http://schemas.microsoft.com/office/drawing/2014/main" id="{3D6A37EB-6255-4B82-BFFE-E8917064B9A4}"/>
-              </a:ext>
-            </a:extLst>
-          </p:cNvPr>
-          <p:cNvSpPr>
-            <a:spLocks xmlns:a="http://schemas.openxmlformats.org/drawingml/2006/main" noGrp="1"/>
-          </p:cNvSpPr>
-          <p:nvPr/>
-        </p:nvSpPr>
-        <p:spPr>
-          <a:xfrm xmlns:a="http://schemas.openxmlformats.org/drawingml/2006/main">
-            <a:off x="1714500" y="3705225"/>
-            <a:ext cx="9429750" cy="609600"/>
+              <a:t>4</a:t>
+            </a:r>
+          </a:p>
+        </p:txBody>
+      </p:sp>
+      <p:sp>
+        <p:nvSpPr>
+          <p:cNvPr id="22" name="">
+            <a:extLst xmlns:a="http://schemas.openxmlformats.org/drawingml/2006/main">
+              <a:ext uri="{FF2B5EF4-FFF2-40B4-BE49-F238E27FC236}">
+                <a16:creationId xmlns:a16="http://schemas.microsoft.com/office/drawing/2014/main" id="{0D4994E5-563E-40E3-82C7-F3B4A457A5B4}"/>
+              </a:ext>
+            </a:extLst>
+          </p:cNvPr>
+          <p:cNvSpPr>
+            <a:spLocks xmlns:a="http://schemas.openxmlformats.org/drawingml/2006/main" noGrp="1"/>
+          </p:cNvSpPr>
+          <p:nvPr/>
+        </p:nvSpPr>
+        <p:spPr>
+          <a:xfrm xmlns:a="http://schemas.openxmlformats.org/drawingml/2006/main">
+            <a:off x="1714500" y="4229100"/>
+            <a:ext cx="9525000" cy="638175"/>
           </a:xfrm>
           <a:prstGeom xmlns:a="http://schemas.openxmlformats.org/drawingml/2006/main" prst="rect">
             <a:avLst/>
@@ -8732,7 +8823,7 @@
           <a:lstStyle xmlns:a="http://schemas.openxmlformats.org/drawingml/2006/main"/>
           <a:p xmlns:a="http://schemas.openxmlformats.org/drawingml/2006/main">
             <a:pPr algn="l">
-              <a:defRPr sz="1500" b="0">
+              <a:defRPr sz="1575" b="0">
                 <a:solidFill>
                   <a:srgbClr val="17253A"/>
                 </a:solidFill>
@@ -8742,7 +8833,7 @@
               </a:defRPr>
             </a:pPr>
             <a:r>
-              <a:rPr sz="1500" b="0">
+              <a:rPr sz="1575" b="0">
                 <a:solidFill>
                   <a:srgbClr val="17253A"/>
                 </a:solidFill>
@@ -8750,59 +8841,61 @@
                 <a:ea typeface="Arial"/>
                 <a:cs typeface="Arial"/>
               </a:rPr>
-              <a:t>Multiply by 5: first partial product 1630.</a:t>
-            </a:r>
-          </a:p>
-        </p:txBody>
-      </p:sp>
-      <p:sp>
-        <p:nvSpPr>
-          <p:cNvPr id="21" name="">
-            <a:extLst xmlns:a="http://schemas.openxmlformats.org/drawingml/2006/main">
-              <a:ext uri="{FF2B5EF4-FFF2-40B4-BE49-F238E27FC236}">
-                <a16:creationId xmlns:a16="http://schemas.microsoft.com/office/drawing/2014/main" id="{38FFAAA8-1E58-458E-BB53-9B598E5B5885}"/>
-              </a:ext>
-            </a:extLst>
-          </p:cNvPr>
-          <p:cNvSpPr>
-            <a:spLocks xmlns:a="http://schemas.openxmlformats.org/drawingml/2006/main" noGrp="1"/>
-          </p:cNvSpPr>
-          <p:nvPr/>
-        </p:nvSpPr>
-        <p:spPr>
-          <a:xfrm xmlns:a="http://schemas.openxmlformats.org/drawingml/2006/main">
-            <a:off x="1000125" y="4514850"/>
-            <a:ext cx="476250" cy="476250"/>
-          </a:xfrm>
-          <a:prstGeom xmlns:a="http://schemas.openxmlformats.org/drawingml/2006/main" prst="ellipse">
+              <a:t>1,630 + 13,040 = 14,670</a:t>
+            </a:r>
+          </a:p>
+        </p:txBody>
+      </p:sp>
+      <p:sp>
+        <p:nvSpPr>
+          <p:cNvPr id="23" name="">
+            <a:extLst xmlns:a="http://schemas.openxmlformats.org/drawingml/2006/main">
+              <a:ext uri="{FF2B5EF4-FFF2-40B4-BE49-F238E27FC236}">
+                <a16:creationId xmlns:a16="http://schemas.microsoft.com/office/drawing/2014/main" id="{18C02FEC-A790-48FA-A148-59CD79A2E10A}"/>
+              </a:ext>
+            </a:extLst>
+          </p:cNvPr>
+          <p:cNvSpPr>
+            <a:spLocks xmlns:a="http://schemas.openxmlformats.org/drawingml/2006/main" noGrp="1"/>
+          </p:cNvSpPr>
+          <p:nvPr/>
+        </p:nvSpPr>
+        <p:spPr>
+          <a:xfrm xmlns:a="http://schemas.openxmlformats.org/drawingml/2006/main">
+            <a:off x="1714500" y="4886325"/>
+            <a:ext cx="9334500" cy="9525"/>
+          </a:xfrm>
+          <a:prstGeom xmlns:a="http://schemas.openxmlformats.org/drawingml/2006/main" prst="rect">
             <a:avLst/>
           </a:prstGeom>
           <a:solidFill xmlns:a="http://schemas.openxmlformats.org/drawingml/2006/main">
-            <a:srgbClr val="2C6E73"/>
+            <a:srgbClr val="D9E0E6"/>
           </a:solidFill>
           <a:ln xmlns:a="http://schemas.openxmlformats.org/drawingml/2006/main" w="0">
-            <a:noFill/>
-          </a:ln>
-        </p:spPr>
-      </p:sp>
-      <p:sp>
-        <p:nvSpPr>
-          <p:cNvPr id="22" name="">
-            <a:extLst xmlns:a="http://schemas.openxmlformats.org/drawingml/2006/main">
-              <a:ext uri="{FF2B5EF4-FFF2-40B4-BE49-F238E27FC236}">
-                <a16:creationId xmlns:a16="http://schemas.microsoft.com/office/drawing/2014/main" id="{21D1E435-DD8C-498A-876D-A5AEE6F0AEDC}"/>
-              </a:ext>
-            </a:extLst>
-          </p:cNvPr>
-          <p:cNvSpPr>
-            <a:spLocks xmlns:a="http://schemas.openxmlformats.org/drawingml/2006/main" noGrp="1"/>
-          </p:cNvSpPr>
-          <p:nvPr/>
-        </p:nvSpPr>
-        <p:spPr>
-          <a:xfrm xmlns:a="http://schemas.openxmlformats.org/drawingml/2006/main">
-            <a:off x="1000125" y="4543425"/>
-            <a:ext cx="476250" cy="419100"/>
+            <a:solidFill>
+              <a:srgbClr val="D9E0E6"/>
+            </a:solidFill>
+          </a:ln>
+        </p:spPr>
+      </p:sp>
+      <p:sp>
+        <p:nvSpPr>
+          <p:cNvPr id="24" name="">
+            <a:extLst xmlns:a="http://schemas.openxmlformats.org/drawingml/2006/main">
+              <a:ext uri="{FF2B5EF4-FFF2-40B4-BE49-F238E27FC236}">
+                <a16:creationId xmlns:a16="http://schemas.microsoft.com/office/drawing/2014/main" id="{B2E84CB3-9118-4A7B-A300-F537E20970D2}"/>
+              </a:ext>
+            </a:extLst>
+          </p:cNvPr>
+          <p:cNvSpPr>
+            <a:spLocks xmlns:a="http://schemas.openxmlformats.org/drawingml/2006/main" noGrp="1"/>
+          </p:cNvSpPr>
+          <p:nvPr/>
+        </p:nvSpPr>
+        <p:spPr>
+          <a:xfrm xmlns:a="http://schemas.openxmlformats.org/drawingml/2006/main">
+            <a:off x="1162050" y="5019675"/>
+            <a:ext cx="400050" cy="400050"/>
           </a:xfrm>
           <a:prstGeom xmlns:a="http://schemas.openxmlformats.org/drawingml/2006/main" prst="rect">
             <a:avLst/>
@@ -8819,9 +8912,9 @@
           <a:lstStyle xmlns:a="http://schemas.openxmlformats.org/drawingml/2006/main"/>
           <a:p xmlns:a="http://schemas.openxmlformats.org/drawingml/2006/main">
             <a:pPr algn="ctr">
-              <a:defRPr sz="1350" b="1">
-                <a:solidFill>
-                  <a:srgbClr val="FFFFFF"/>
+              <a:defRPr sz="1125" b="1">
+                <a:solidFill>
+                  <a:srgbClr val="2F785D"/>
                 </a:solidFill>
                 <a:latin typeface="Arial"/>
                 <a:ea typeface="Arial"/>
@@ -8829,37 +8922,37 @@
               </a:defRPr>
             </a:pPr>
             <a:r>
-              <a:rPr sz="1350" b="1">
-                <a:solidFill>
-                  <a:srgbClr val="FFFFFF"/>
+              <a:rPr sz="1125" b="1">
+                <a:solidFill>
+                  <a:srgbClr val="2F785D"/>
                 </a:solidFill>
                 <a:latin typeface="Arial"/>
                 <a:ea typeface="Arial"/>
                 <a:cs typeface="Arial"/>
               </a:rPr>
-              <a:t>3</a:t>
-            </a:r>
-          </a:p>
-        </p:txBody>
-      </p:sp>
-      <p:sp>
-        <p:nvSpPr>
-          <p:cNvPr id="23" name="">
-            <a:extLst xmlns:a="http://schemas.openxmlformats.org/drawingml/2006/main">
-              <a:ext uri="{FF2B5EF4-FFF2-40B4-BE49-F238E27FC236}">
-                <a16:creationId xmlns:a16="http://schemas.microsoft.com/office/drawing/2014/main" id="{DE4ABD00-92EC-40B3-AC2F-A1994CB0764B}"/>
-              </a:ext>
-            </a:extLst>
-          </p:cNvPr>
-          <p:cNvSpPr>
-            <a:spLocks xmlns:a="http://schemas.openxmlformats.org/drawingml/2006/main" noGrp="1"/>
-          </p:cNvSpPr>
-          <p:nvPr/>
-        </p:nvSpPr>
-        <p:spPr>
-          <a:xfrm xmlns:a="http://schemas.openxmlformats.org/drawingml/2006/main">
-            <a:off x="1714500" y="4448175"/>
-            <a:ext cx="9429750" cy="609600"/>
+              <a:t>5</a:t>
+            </a:r>
+          </a:p>
+        </p:txBody>
+      </p:sp>
+      <p:sp>
+        <p:nvSpPr>
+          <p:cNvPr id="25" name="">
+            <a:extLst xmlns:a="http://schemas.openxmlformats.org/drawingml/2006/main">
+              <a:ext uri="{FF2B5EF4-FFF2-40B4-BE49-F238E27FC236}">
+                <a16:creationId xmlns:a16="http://schemas.microsoft.com/office/drawing/2014/main" id="{96D1AB03-0040-4FA2-A34F-EEAA180045AD}"/>
+              </a:ext>
+            </a:extLst>
+          </p:cNvPr>
+          <p:cNvSpPr>
+            <a:spLocks xmlns:a="http://schemas.openxmlformats.org/drawingml/2006/main" noGrp="1"/>
+          </p:cNvSpPr>
+          <p:nvPr/>
+        </p:nvSpPr>
+        <p:spPr>
+          <a:xfrm xmlns:a="http://schemas.openxmlformats.org/drawingml/2006/main">
+            <a:off x="1714500" y="4933950"/>
+            <a:ext cx="9525000" cy="638175"/>
           </a:xfrm>
           <a:prstGeom xmlns:a="http://schemas.openxmlformats.org/drawingml/2006/main" prst="rect">
             <a:avLst/>
@@ -8876,9 +8969,9 @@
           <a:lstStyle xmlns:a="http://schemas.openxmlformats.org/drawingml/2006/main"/>
           <a:p xmlns:a="http://schemas.openxmlformats.org/drawingml/2006/main">
             <a:pPr algn="l">
-              <a:defRPr sz="1500" b="0">
-                <a:solidFill>
-                  <a:srgbClr val="17253A"/>
+              <a:defRPr sz="1575" b="1">
+                <a:solidFill>
+                  <a:srgbClr val="2F785D"/>
                 </a:solidFill>
                 <a:latin typeface="Arial"/>
                 <a:ea typeface="Arial"/>
@@ -8886,159 +8979,15 @@
               </a:defRPr>
             </a:pPr>
             <a:r>
-              <a:rPr sz="1500" b="0">
-                <a:solidFill>
-                  <a:srgbClr val="17253A"/>
+              <a:rPr sz="1575" b="1">
+                <a:solidFill>
+                  <a:srgbClr val="2F785D"/>
                 </a:solidFill>
                 <a:latin typeface="Arial"/>
                 <a:ea typeface="Arial"/>
                 <a:cs typeface="Arial"/>
               </a:rPr>
-              <a:t>Multiply by 40: second partial product 13040.</a:t>
-            </a:r>
-          </a:p>
-        </p:txBody>
-      </p:sp>
-      <p:sp>
-        <p:nvSpPr>
-          <p:cNvPr id="24" name="">
-            <a:extLst xmlns:a="http://schemas.openxmlformats.org/drawingml/2006/main">
-              <a:ext uri="{FF2B5EF4-FFF2-40B4-BE49-F238E27FC236}">
-                <a16:creationId xmlns:a16="http://schemas.microsoft.com/office/drawing/2014/main" id="{407CE455-FFAA-46EB-A8A2-B09BEB3CC21B}"/>
-              </a:ext>
-            </a:extLst>
-          </p:cNvPr>
-          <p:cNvSpPr>
-            <a:spLocks xmlns:a="http://schemas.openxmlformats.org/drawingml/2006/main" noGrp="1"/>
-          </p:cNvSpPr>
-          <p:nvPr/>
-        </p:nvSpPr>
-        <p:spPr>
-          <a:xfrm xmlns:a="http://schemas.openxmlformats.org/drawingml/2006/main">
-            <a:off x="1000125" y="5257800"/>
-            <a:ext cx="476250" cy="476250"/>
-          </a:xfrm>
-          <a:prstGeom xmlns:a="http://schemas.openxmlformats.org/drawingml/2006/main" prst="ellipse">
-            <a:avLst/>
-          </a:prstGeom>
-          <a:solidFill xmlns:a="http://schemas.openxmlformats.org/drawingml/2006/main">
-            <a:srgbClr val="2C6E73"/>
-          </a:solidFill>
-          <a:ln xmlns:a="http://schemas.openxmlformats.org/drawingml/2006/main" w="0">
-            <a:noFill/>
-          </a:ln>
-        </p:spPr>
-      </p:sp>
-      <p:sp>
-        <p:nvSpPr>
-          <p:cNvPr id="25" name="">
-            <a:extLst xmlns:a="http://schemas.openxmlformats.org/drawingml/2006/main">
-              <a:ext uri="{FF2B5EF4-FFF2-40B4-BE49-F238E27FC236}">
-                <a16:creationId xmlns:a16="http://schemas.microsoft.com/office/drawing/2014/main" id="{43934CCE-E56B-4043-887B-1016CFDD67A6}"/>
-              </a:ext>
-            </a:extLst>
-          </p:cNvPr>
-          <p:cNvSpPr>
-            <a:spLocks xmlns:a="http://schemas.openxmlformats.org/drawingml/2006/main" noGrp="1"/>
-          </p:cNvSpPr>
-          <p:nvPr/>
-        </p:nvSpPr>
-        <p:spPr>
-          <a:xfrm xmlns:a="http://schemas.openxmlformats.org/drawingml/2006/main">
-            <a:off x="1000125" y="5286375"/>
-            <a:ext cx="476250" cy="419100"/>
-          </a:xfrm>
-          <a:prstGeom xmlns:a="http://schemas.openxmlformats.org/drawingml/2006/main" prst="rect">
-            <a:avLst/>
-          </a:prstGeom>
-          <a:noFill xmlns:a="http://schemas.openxmlformats.org/drawingml/2006/main"/>
-          <a:ln xmlns:a="http://schemas.openxmlformats.org/drawingml/2006/main" w="0">
-            <a:noFill/>
-          </a:ln>
-        </p:spPr>
-        <p:txBody>
-          <a:bodyPr xmlns:a="http://schemas.openxmlformats.org/drawingml/2006/main" anchor="ctr">
-            <a:normAutofit fontScale="100000"/>
-          </a:bodyPr>
-          <a:lstStyle xmlns:a="http://schemas.openxmlformats.org/drawingml/2006/main"/>
-          <a:p xmlns:a="http://schemas.openxmlformats.org/drawingml/2006/main">
-            <a:pPr algn="ctr">
-              <a:defRPr sz="1350" b="1">
-                <a:solidFill>
-                  <a:srgbClr val="FFFFFF"/>
-                </a:solidFill>
-                <a:latin typeface="Arial"/>
-                <a:ea typeface="Arial"/>
-                <a:cs typeface="Arial"/>
-              </a:defRPr>
-            </a:pPr>
-            <a:r>
-              <a:rPr sz="1350" b="1">
-                <a:solidFill>
-                  <a:srgbClr val="FFFFFF"/>
-                </a:solidFill>
-                <a:latin typeface="Arial"/>
-                <a:ea typeface="Arial"/>
-                <a:cs typeface="Arial"/>
-              </a:rPr>
-              <a:t>4</a:t>
-            </a:r>
-          </a:p>
-        </p:txBody>
-      </p:sp>
-      <p:sp>
-        <p:nvSpPr>
-          <p:cNvPr id="26" name="">
-            <a:extLst xmlns:a="http://schemas.openxmlformats.org/drawingml/2006/main">
-              <a:ext uri="{FF2B5EF4-FFF2-40B4-BE49-F238E27FC236}">
-                <a16:creationId xmlns:a16="http://schemas.microsoft.com/office/drawing/2014/main" id="{DE3E8BFB-E444-4BAD-A40F-7928D89E3551}"/>
-              </a:ext>
-            </a:extLst>
-          </p:cNvPr>
-          <p:cNvSpPr>
-            <a:spLocks xmlns:a="http://schemas.openxmlformats.org/drawingml/2006/main" noGrp="1"/>
-          </p:cNvSpPr>
-          <p:nvPr/>
-        </p:nvSpPr>
-        <p:spPr>
-          <a:xfrm xmlns:a="http://schemas.openxmlformats.org/drawingml/2006/main">
-            <a:off x="1714500" y="5191125"/>
-            <a:ext cx="9429750" cy="609600"/>
-          </a:xfrm>
-          <a:prstGeom xmlns:a="http://schemas.openxmlformats.org/drawingml/2006/main" prst="rect">
-            <a:avLst/>
-          </a:prstGeom>
-          <a:noFill xmlns:a="http://schemas.openxmlformats.org/drawingml/2006/main"/>
-          <a:ln xmlns:a="http://schemas.openxmlformats.org/drawingml/2006/main" w="0">
-            <a:noFill/>
-          </a:ln>
-        </p:spPr>
-        <p:txBody>
-          <a:bodyPr xmlns:a="http://schemas.openxmlformats.org/drawingml/2006/main" anchor="ctr">
-            <a:normAutofit fontScale="100000"/>
-          </a:bodyPr>
-          <a:lstStyle xmlns:a="http://schemas.openxmlformats.org/drawingml/2006/main"/>
-          <a:p xmlns:a="http://schemas.openxmlformats.org/drawingml/2006/main">
-            <a:pPr algn="l">
-              <a:defRPr sz="1500" b="1">
-                <a:solidFill>
-                  <a:srgbClr val="2F785D"/>
-                </a:solidFill>
-                <a:latin typeface="Arial"/>
-                <a:ea typeface="Arial"/>
-                <a:cs typeface="Arial"/>
-              </a:defRPr>
-            </a:pPr>
-            <a:r>
-              <a:rPr sz="1500" b="1">
-                <a:solidFill>
-                  <a:srgbClr val="2F785D"/>
-                </a:solidFill>
-                <a:latin typeface="Arial"/>
-                <a:ea typeface="Arial"/>
-                <a:cs typeface="Arial"/>
-              </a:rPr>
-              <a:t>Add the partial products: 1630 + 13040 = 14670.</a:t>
+              <a:t>Miro used 4 instead of 40</a:t>
             </a:r>
           </a:p>
         </p:txBody>
@@ -9046,7 +8995,7 @@
     </p:spTree>
     <p:extLst>
       <p:ext uri="{BB962C8B-B14F-4D97-AF65-F5344CB8AC3E}">
-        <p14:creationId xmlns:p14="http://schemas.microsoft.com/office/powerpoint/2010/main" val="1145574872"/>
+        <p14:creationId xmlns:p14="http://schemas.microsoft.com/office/powerpoint/2010/main" val="639630056"/>
       </p:ext>
     </p:extLst>
   </p:cSld>
@@ -9129,7 +9078,7 @@
                                           </p:stCondLst>
                                         </p:cTn>
                                         <p:tgtEl>
-                                          <p:spTgt spid="12"/>
+                                          <p:spTgt spid="13"/>
                                         </p:tgtEl>
                                         <p:attrNameLst>
                                           <p:attrName>style.visibility</p:attrName>
@@ -9174,7 +9123,7 @@
                                           </p:stCondLst>
                                         </p:cTn>
                                         <p:tgtEl>
-                                          <p:spTgt spid="13"/>
+                                          <p:spTgt spid="16"/>
                                         </p:tgtEl>
                                         <p:attrNameLst>
                                           <p:attrName>style.visibility</p:attrName>
@@ -9219,7 +9168,7 @@
                                           </p:stCondLst>
                                         </p:cTn>
                                         <p:tgtEl>
-                                          <p:spTgt spid="14"/>
+                                          <p:spTgt spid="19"/>
                                         </p:tgtEl>
                                         <p:attrNameLst>
                                           <p:attrName>style.visibility</p:attrName>
@@ -9264,7 +9213,7 @@
                                           </p:stCondLst>
                                         </p:cTn>
                                         <p:tgtEl>
-                                          <p:spTgt spid="17"/>
+                                          <p:spTgt spid="22"/>
                                         </p:tgtEl>
                                         <p:attrNameLst>
                                           <p:attrName>style.visibility</p:attrName>
@@ -9309,97 +9258,7 @@
                                           </p:stCondLst>
                                         </p:cTn>
                                         <p:tgtEl>
-                                          <p:spTgt spid="20"/>
-                                        </p:tgtEl>
-                                        <p:attrNameLst>
-                                          <p:attrName>style.visibility</p:attrName>
-                                        </p:attrNameLst>
-                                      </p:cBhvr>
-                                      <p:to>
-                                        <p:strVal val="visible"/>
-                                      </p:to>
-                                    </p:set>
-                                  </p:childTnLst>
-                                </p:cTn>
-                              </p:par>
-                            </p:childTnLst>
-                          </p:cTn>
-                        </p:par>
-                      </p:childTnLst>
-                    </p:cTn>
-                  </p:par>
-                  <p:par>
-                    <p:cTn id="27" fill="hold">
-                      <p:stCondLst>
-                        <p:cond delay="indefinite"/>
-                      </p:stCondLst>
-                      <p:childTnLst>
-                        <p:par>
-                          <p:cTn id="28" fill="hold">
-                            <p:stCondLst>
-                              <p:cond delay="0"/>
-                            </p:stCondLst>
-                            <p:childTnLst>
-                              <p:par>
-                                <p:cTn id="29" presetID="1" presetClass="entr" presetSubtype="0" fill="hold" grpId="0" nodeType="clickEffect">
-                                  <p:stCondLst>
-                                    <p:cond delay="0"/>
-                                  </p:stCondLst>
-                                  <p:childTnLst>
-                                    <p:set>
-                                      <p:cBhvr>
-                                        <p:cTn id="30" dur="1" fill="hold">
-                                          <p:stCondLst>
-                                            <p:cond delay="0"/>
-                                          </p:stCondLst>
-                                        </p:cTn>
-                                        <p:tgtEl>
-                                          <p:spTgt spid="23"/>
-                                        </p:tgtEl>
-                                        <p:attrNameLst>
-                                          <p:attrName>style.visibility</p:attrName>
-                                        </p:attrNameLst>
-                                      </p:cBhvr>
-                                      <p:to>
-                                        <p:strVal val="visible"/>
-                                      </p:to>
-                                    </p:set>
-                                  </p:childTnLst>
-                                </p:cTn>
-                              </p:par>
-                            </p:childTnLst>
-                          </p:cTn>
-                        </p:par>
-                      </p:childTnLst>
-                    </p:cTn>
-                  </p:par>
-                  <p:par>
-                    <p:cTn id="31" fill="hold">
-                      <p:stCondLst>
-                        <p:cond delay="indefinite"/>
-                      </p:stCondLst>
-                      <p:childTnLst>
-                        <p:par>
-                          <p:cTn id="32" fill="hold">
-                            <p:stCondLst>
-                              <p:cond delay="0"/>
-                            </p:stCondLst>
-                            <p:childTnLst>
-                              <p:par>
-                                <p:cTn id="33" presetID="1" presetClass="entr" presetSubtype="0" fill="hold" grpId="0" nodeType="clickEffect">
-                                  <p:stCondLst>
-                                    <p:cond delay="0"/>
-                                  </p:stCondLst>
-                                  <p:childTnLst>
-                                    <p:set>
-                                      <p:cBhvr>
-                                        <p:cTn id="34" dur="1" fill="hold">
-                                          <p:stCondLst>
-                                            <p:cond delay="0"/>
-                                          </p:stCondLst>
-                                        </p:cTn>
-                                        <p:tgtEl>
-                                          <p:spTgt spid="26"/>
+                                          <p:spTgt spid="25"/>
                                         </p:tgtEl>
                                         <p:attrNameLst>
                                           <p:attrName>style.visibility</p:attrName>
@@ -9441,13 +9300,11 @@
     </p:tnLst>
     <p:bldLst>
       <p:bldP spid="10" grpId="0"/>
-      <p:bldP spid="12" grpId="0"/>
       <p:bldP spid="13" grpId="0"/>
-      <p:bldP spid="14" grpId="0"/>
-      <p:bldP spid="17" grpId="0"/>
-      <p:bldP spid="20" grpId="0"/>
-      <p:bldP spid="23" grpId="0"/>
-      <p:bldP spid="26" grpId="0"/>
+      <p:bldP spid="16" grpId="0"/>
+      <p:bldP spid="19" grpId="0"/>
+      <p:bldP spid="22" grpId="0"/>
+      <p:bldP spid="25" grpId="0"/>
     </p:bldLst>
   </p:timing>
 </p:sld>
@@ -9477,7 +9334,7 @@
           <p:cNvPr id="15" name="">
             <a:extLst xmlns:a="http://schemas.openxmlformats.org/drawingml/2006/main">
               <a:ext uri="{FF2B5EF4-FFF2-40B4-BE49-F238E27FC236}">
-                <a16:creationId xmlns:a16="http://schemas.microsoft.com/office/drawing/2014/main" id="{F00CE8F9-3432-49A8-B3D5-4534DFFE1918}"/>
+                <a16:creationId xmlns:a16="http://schemas.microsoft.com/office/drawing/2014/main" id="{A433A8EF-47CB-4897-9067-2A874D7114EB}"/>
               </a:ext>
             </a:extLst>
           </p:cNvPr>
@@ -9509,7 +9366,7 @@
           <p:cNvPr id="2" name="">
             <a:extLst xmlns:a="http://schemas.openxmlformats.org/drawingml/2006/main">
               <a:ext uri="{FF2B5EF4-FFF2-40B4-BE49-F238E27FC236}">
-                <a16:creationId xmlns:a16="http://schemas.microsoft.com/office/drawing/2014/main" id="{5F978293-6791-41C9-BC29-117142941FD1}"/>
+                <a16:creationId xmlns:a16="http://schemas.microsoft.com/office/drawing/2014/main" id="{C1BBAB1E-5CA2-4B1F-9944-C7D57760A26B}"/>
               </a:ext>
             </a:extLst>
           </p:cNvPr>
@@ -9566,7 +9423,7 @@
           <p:cNvPr id="3" name="">
             <a:extLst xmlns:a="http://schemas.openxmlformats.org/drawingml/2006/main">
               <a:ext uri="{FF2B5EF4-FFF2-40B4-BE49-F238E27FC236}">
-                <a16:creationId xmlns:a16="http://schemas.microsoft.com/office/drawing/2014/main" id="{54508C83-C31E-47AD-879C-382DDB4D278C}"/>
+                <a16:creationId xmlns:a16="http://schemas.microsoft.com/office/drawing/2014/main" id="{34B5AC4E-7FC2-4ACE-A41E-D97386CE0849}"/>
               </a:ext>
             </a:extLst>
           </p:cNvPr>
@@ -9598,7 +9455,7 @@
           <p:cNvPr id="4" name="">
             <a:extLst xmlns:a="http://schemas.openxmlformats.org/drawingml/2006/main">
               <a:ext uri="{FF2B5EF4-FFF2-40B4-BE49-F238E27FC236}">
-                <a16:creationId xmlns:a16="http://schemas.microsoft.com/office/drawing/2014/main" id="{40C3DD08-9546-46C0-BF48-9599801AC6A9}"/>
+                <a16:creationId xmlns:a16="http://schemas.microsoft.com/office/drawing/2014/main" id="{71467A8E-B977-4E2A-9C30-451472F2D460}"/>
               </a:ext>
             </a:extLst>
           </p:cNvPr>
@@ -9655,7 +9512,7 @@
           <p:cNvPr id="5" name="">
             <a:extLst xmlns:a="http://schemas.openxmlformats.org/drawingml/2006/main">
               <a:ext uri="{FF2B5EF4-FFF2-40B4-BE49-F238E27FC236}">
-                <a16:creationId xmlns:a16="http://schemas.microsoft.com/office/drawing/2014/main" id="{900C8E6C-78DA-4C97-995B-D45A37B697C7}"/>
+                <a16:creationId xmlns:a16="http://schemas.microsoft.com/office/drawing/2014/main" id="{93FA408A-E1A0-4909-AAF8-EF003850A835}"/>
               </a:ext>
             </a:extLst>
           </p:cNvPr>
@@ -9712,7 +9569,7 @@
           <p:cNvPr id="6" name="">
             <a:extLst xmlns:a="http://schemas.openxmlformats.org/drawingml/2006/main">
               <a:ext uri="{FF2B5EF4-FFF2-40B4-BE49-F238E27FC236}">
-                <a16:creationId xmlns:a16="http://schemas.microsoft.com/office/drawing/2014/main" id="{F11F1BC5-C037-485D-B38C-4652D5666DB6}"/>
+                <a16:creationId xmlns:a16="http://schemas.microsoft.com/office/drawing/2014/main" id="{70B97579-08AC-421E-BD5A-DFD8F9C820AA}"/>
               </a:ext>
             </a:extLst>
           </p:cNvPr>
@@ -9769,7 +9626,7 @@
           <p:cNvPr id="7" name="">
             <a:extLst xmlns:a="http://schemas.openxmlformats.org/drawingml/2006/main">
               <a:ext uri="{FF2B5EF4-FFF2-40B4-BE49-F238E27FC236}">
-                <a16:creationId xmlns:a16="http://schemas.microsoft.com/office/drawing/2014/main" id="{83CD8BDB-99FC-4604-A2DA-F4B9D6785EE3}"/>
+                <a16:creationId xmlns:a16="http://schemas.microsoft.com/office/drawing/2014/main" id="{5EBFBB71-B110-416A-B6D2-9556B7835A07}"/>
               </a:ext>
             </a:extLst>
           </p:cNvPr>
@@ -9801,7 +9658,7 @@
           <p:cNvPr id="8" name="">
             <a:extLst xmlns:a="http://schemas.openxmlformats.org/drawingml/2006/main">
               <a:ext uri="{FF2B5EF4-FFF2-40B4-BE49-F238E27FC236}">
-                <a16:creationId xmlns:a16="http://schemas.microsoft.com/office/drawing/2014/main" id="{7183249F-C2FB-4768-B00B-B59BBC221BDA}"/>
+                <a16:creationId xmlns:a16="http://schemas.microsoft.com/office/drawing/2014/main" id="{8ED1C990-77CD-4EF2-9707-DDA221B42911}"/>
               </a:ext>
             </a:extLst>
           </p:cNvPr>
@@ -9858,7 +9715,7 @@
           <p:cNvPr id="9" name="">
             <a:extLst xmlns:a="http://schemas.openxmlformats.org/drawingml/2006/main">
               <a:ext uri="{FF2B5EF4-FFF2-40B4-BE49-F238E27FC236}">
-                <a16:creationId xmlns:a16="http://schemas.microsoft.com/office/drawing/2014/main" id="{D9E79266-0F8E-4C72-ABE3-CF5026F6A062}"/>
+                <a16:creationId xmlns:a16="http://schemas.microsoft.com/office/drawing/2014/main" id="{2DF8F9E7-20C5-40EA-B24A-506C9C550B94}"/>
               </a:ext>
             </a:extLst>
           </p:cNvPr>
@@ -9915,7 +9772,7 @@
           <p:cNvPr id="10" name="">
             <a:extLst xmlns:a="http://schemas.openxmlformats.org/drawingml/2006/main">
               <a:ext uri="{FF2B5EF4-FFF2-40B4-BE49-F238E27FC236}">
-                <a16:creationId xmlns:a16="http://schemas.microsoft.com/office/drawing/2014/main" id="{7B290108-BEEB-4242-991E-47E7C15554F6}"/>
+                <a16:creationId xmlns:a16="http://schemas.microsoft.com/office/drawing/2014/main" id="{FE370DEA-B4EA-4A33-8C5A-58A92ABF34DB}"/>
               </a:ext>
             </a:extLst>
           </p:cNvPr>
@@ -9972,7 +9829,7 @@
           <p:cNvPr id="11" name="">
             <a:extLst xmlns:a="http://schemas.openxmlformats.org/drawingml/2006/main">
               <a:ext uri="{FF2B5EF4-FFF2-40B4-BE49-F238E27FC236}">
-                <a16:creationId xmlns:a16="http://schemas.microsoft.com/office/drawing/2014/main" id="{CF2A97C8-7202-400D-A19C-D929ADB00B4A}"/>
+                <a16:creationId xmlns:a16="http://schemas.microsoft.com/office/drawing/2014/main" id="{2FC8D2DE-D732-4155-A4D1-4E0186158159}"/>
               </a:ext>
             </a:extLst>
           </p:cNvPr>
@@ -10029,7 +9886,7 @@
           <p:cNvPr id="12" name="">
             <a:extLst xmlns:a="http://schemas.openxmlformats.org/drawingml/2006/main">
               <a:ext uri="{FF2B5EF4-FFF2-40B4-BE49-F238E27FC236}">
-                <a16:creationId xmlns:a16="http://schemas.microsoft.com/office/drawing/2014/main" id="{EA4B92A6-7D3F-48D4-916C-456104927607}"/>
+                <a16:creationId xmlns:a16="http://schemas.microsoft.com/office/drawing/2014/main" id="{6F6BBE08-AACC-4D3F-B1ED-2E0BD9A9ED55}"/>
               </a:ext>
             </a:extLst>
           </p:cNvPr>
@@ -10061,7 +9918,7 @@
           <p:cNvPr id="13" name="">
             <a:extLst xmlns:a="http://schemas.openxmlformats.org/drawingml/2006/main">
               <a:ext uri="{FF2B5EF4-FFF2-40B4-BE49-F238E27FC236}">
-                <a16:creationId xmlns:a16="http://schemas.microsoft.com/office/drawing/2014/main" id="{C0CDAF70-0C49-476B-B2E7-7A26F3BE21BA}"/>
+                <a16:creationId xmlns:a16="http://schemas.microsoft.com/office/drawing/2014/main" id="{440AE269-CB81-4B77-82A3-4F8BC9A87F61}"/>
               </a:ext>
             </a:extLst>
           </p:cNvPr>
@@ -10118,7 +9975,7 @@
           <p:cNvPr id="14" name="">
             <a:extLst xmlns:a="http://schemas.openxmlformats.org/drawingml/2006/main">
               <a:ext uri="{FF2B5EF4-FFF2-40B4-BE49-F238E27FC236}">
-                <a16:creationId xmlns:a16="http://schemas.microsoft.com/office/drawing/2014/main" id="{EA642921-0222-451F-A3C4-20FCD949C07C}"/>
+                <a16:creationId xmlns:a16="http://schemas.microsoft.com/office/drawing/2014/main" id="{351A52FA-A1C5-41AA-A554-4819F95E6EAF}"/>
               </a:ext>
             </a:extLst>
           </p:cNvPr>
@@ -10173,7 +10030,7 @@
     </p:spTree>
     <p:extLst>
       <p:ext uri="{BB962C8B-B14F-4D97-AF65-F5344CB8AC3E}">
-        <p14:creationId xmlns:p14="http://schemas.microsoft.com/office/powerpoint/2010/main" val="779640028"/>
+        <p14:creationId xmlns:p14="http://schemas.microsoft.com/office/powerpoint/2010/main" val="507402585"/>
       </p:ext>
     </p:extLst>
   </p:cSld>
@@ -10374,7 +10231,7 @@
           <p:cNvPr id="16" name="">
             <a:extLst xmlns:a="http://schemas.openxmlformats.org/drawingml/2006/main">
               <a:ext uri="{FF2B5EF4-FFF2-40B4-BE49-F238E27FC236}">
-                <a16:creationId xmlns:a16="http://schemas.microsoft.com/office/drawing/2014/main" id="{0B69C4CB-CCF0-419C-A9F8-CB449A3E43FD}"/>
+                <a16:creationId xmlns:a16="http://schemas.microsoft.com/office/drawing/2014/main" id="{F36E379F-A731-49EC-9263-05283CB415CA}"/>
               </a:ext>
             </a:extLst>
           </p:cNvPr>
@@ -10406,7 +10263,7 @@
           <p:cNvPr id="2" name="">
             <a:extLst xmlns:a="http://schemas.openxmlformats.org/drawingml/2006/main">
               <a:ext uri="{FF2B5EF4-FFF2-40B4-BE49-F238E27FC236}">
-                <a16:creationId xmlns:a16="http://schemas.microsoft.com/office/drawing/2014/main" id="{BE08CCCE-4035-41CE-AE19-EFB9BB99C258}"/>
+                <a16:creationId xmlns:a16="http://schemas.microsoft.com/office/drawing/2014/main" id="{13AA4E3A-A43F-4E37-B52B-B2484729AF68}"/>
               </a:ext>
             </a:extLst>
           </p:cNvPr>
@@ -10463,7 +10320,7 @@
           <p:cNvPr id="3" name="">
             <a:extLst xmlns:a="http://schemas.openxmlformats.org/drawingml/2006/main">
               <a:ext uri="{FF2B5EF4-FFF2-40B4-BE49-F238E27FC236}">
-                <a16:creationId xmlns:a16="http://schemas.microsoft.com/office/drawing/2014/main" id="{EED31D8C-4055-4940-81C0-8D558C22A7CD}"/>
+                <a16:creationId xmlns:a16="http://schemas.microsoft.com/office/drawing/2014/main" id="{5DA18239-E9AB-4825-B0E7-8BBB0EC35E13}"/>
               </a:ext>
             </a:extLst>
           </p:cNvPr>
@@ -10495,7 +10352,7 @@
           <p:cNvPr id="4" name="">
             <a:extLst xmlns:a="http://schemas.openxmlformats.org/drawingml/2006/main">
               <a:ext uri="{FF2B5EF4-FFF2-40B4-BE49-F238E27FC236}">
-                <a16:creationId xmlns:a16="http://schemas.microsoft.com/office/drawing/2014/main" id="{AAC82882-EA31-4C70-A82B-3E4B148F2F2F}"/>
+                <a16:creationId xmlns:a16="http://schemas.microsoft.com/office/drawing/2014/main" id="{F6E99F09-2A96-4F27-831C-5C5106AEB288}"/>
               </a:ext>
             </a:extLst>
           </p:cNvPr>
@@ -10552,7 +10409,7 @@
           <p:cNvPr id="5" name="">
             <a:extLst xmlns:a="http://schemas.openxmlformats.org/drawingml/2006/main">
               <a:ext uri="{FF2B5EF4-FFF2-40B4-BE49-F238E27FC236}">
-                <a16:creationId xmlns:a16="http://schemas.microsoft.com/office/drawing/2014/main" id="{9FD4D9DD-E813-4F14-9F75-DACB0B35CC21}"/>
+                <a16:creationId xmlns:a16="http://schemas.microsoft.com/office/drawing/2014/main" id="{A9D8B65C-C643-427F-BEFC-B519EA317171}"/>
               </a:ext>
             </a:extLst>
           </p:cNvPr>
@@ -10609,7 +10466,7 @@
           <p:cNvPr id="6" name="">
             <a:extLst xmlns:a="http://schemas.openxmlformats.org/drawingml/2006/main">
               <a:ext uri="{FF2B5EF4-FFF2-40B4-BE49-F238E27FC236}">
-                <a16:creationId xmlns:a16="http://schemas.microsoft.com/office/drawing/2014/main" id="{083C11A5-85C1-4F7A-A191-36B9FEF8E836}"/>
+                <a16:creationId xmlns:a16="http://schemas.microsoft.com/office/drawing/2014/main" id="{ED5B672B-3858-4647-AEC6-715FE35C3B6A}"/>
               </a:ext>
             </a:extLst>
           </p:cNvPr>
@@ -10666,7 +10523,7 @@
           <p:cNvPr id="7" name="">
             <a:extLst xmlns:a="http://schemas.openxmlformats.org/drawingml/2006/main">
               <a:ext uri="{FF2B5EF4-FFF2-40B4-BE49-F238E27FC236}">
-                <a16:creationId xmlns:a16="http://schemas.microsoft.com/office/drawing/2014/main" id="{5E98E16D-5C1A-4682-8C1F-E26C7D70F05A}"/>
+                <a16:creationId xmlns:a16="http://schemas.microsoft.com/office/drawing/2014/main" id="{EE831110-D8A1-436B-8319-D02D74AD9AFA}"/>
               </a:ext>
             </a:extLst>
           </p:cNvPr>
@@ -10698,7 +10555,7 @@
           <p:cNvPr id="8" name="">
             <a:extLst xmlns:a="http://schemas.openxmlformats.org/drawingml/2006/main">
               <a:ext uri="{FF2B5EF4-FFF2-40B4-BE49-F238E27FC236}">
-                <a16:creationId xmlns:a16="http://schemas.microsoft.com/office/drawing/2014/main" id="{137E459C-BC5F-4667-8093-96138272A906}"/>
+                <a16:creationId xmlns:a16="http://schemas.microsoft.com/office/drawing/2014/main" id="{0CC2CE9B-CD88-4D67-B737-7918A7C68AB2}"/>
               </a:ext>
             </a:extLst>
           </p:cNvPr>
@@ -10755,7 +10612,7 @@
           <p:cNvPr id="9" name="">
             <a:extLst xmlns:a="http://schemas.openxmlformats.org/drawingml/2006/main">
               <a:ext uri="{FF2B5EF4-FFF2-40B4-BE49-F238E27FC236}">
-                <a16:creationId xmlns:a16="http://schemas.microsoft.com/office/drawing/2014/main" id="{72E9BF21-2EF2-4D66-BE07-2454EB1F2E07}"/>
+                <a16:creationId xmlns:a16="http://schemas.microsoft.com/office/drawing/2014/main" id="{A54EF0F5-A0F0-49D0-AADD-A0FF88B4FF1F}"/>
               </a:ext>
             </a:extLst>
           </p:cNvPr>
@@ -10812,7 +10669,7 @@
           <p:cNvPr id="10" name="">
             <a:extLst xmlns:a="http://schemas.openxmlformats.org/drawingml/2006/main">
               <a:ext uri="{FF2B5EF4-FFF2-40B4-BE49-F238E27FC236}">
-                <a16:creationId xmlns:a16="http://schemas.microsoft.com/office/drawing/2014/main" id="{155A162A-1A33-46B3-A3B6-4F3A9E39D093}"/>
+                <a16:creationId xmlns:a16="http://schemas.microsoft.com/office/drawing/2014/main" id="{67684BD4-9396-4AE6-BB8C-6FF219ABCD4E}"/>
               </a:ext>
             </a:extLst>
           </p:cNvPr>
@@ -10869,7 +10726,7 @@
           <p:cNvPr id="11" name="">
             <a:extLst xmlns:a="http://schemas.openxmlformats.org/drawingml/2006/main">
               <a:ext uri="{FF2B5EF4-FFF2-40B4-BE49-F238E27FC236}">
-                <a16:creationId xmlns:a16="http://schemas.microsoft.com/office/drawing/2014/main" id="{F25F0FDE-8A27-417E-B55F-A65E33C2F2A1}"/>
+                <a16:creationId xmlns:a16="http://schemas.microsoft.com/office/drawing/2014/main" id="{27A9D944-8D9B-42F8-830B-186DB366C979}"/>
               </a:ext>
             </a:extLst>
           </p:cNvPr>
@@ -10926,7 +10783,7 @@
           <p:cNvPr id="12" name="">
             <a:extLst xmlns:a="http://schemas.openxmlformats.org/drawingml/2006/main">
               <a:ext uri="{FF2B5EF4-FFF2-40B4-BE49-F238E27FC236}">
-                <a16:creationId xmlns:a16="http://schemas.microsoft.com/office/drawing/2014/main" id="{78285936-3DC0-4F02-9FF8-722CECCB4F53}"/>
+                <a16:creationId xmlns:a16="http://schemas.microsoft.com/office/drawing/2014/main" id="{C5968B69-E589-4362-8D9B-639FC1186929}"/>
               </a:ext>
             </a:extLst>
           </p:cNvPr>
@@ -10983,7 +10840,7 @@
           <p:cNvPr id="13" name="">
             <a:extLst xmlns:a="http://schemas.openxmlformats.org/drawingml/2006/main">
               <a:ext uri="{FF2B5EF4-FFF2-40B4-BE49-F238E27FC236}">
-                <a16:creationId xmlns:a16="http://schemas.microsoft.com/office/drawing/2014/main" id="{0E348967-6B7B-461C-B11C-AD5C95A80F45}"/>
+                <a16:creationId xmlns:a16="http://schemas.microsoft.com/office/drawing/2014/main" id="{35F3AC87-BAE5-4DD8-BC67-B5947C597882}"/>
               </a:ext>
             </a:extLst>
           </p:cNvPr>
@@ -11040,7 +10897,7 @@
           <p:cNvPr id="14" name="">
             <a:extLst xmlns:a="http://schemas.openxmlformats.org/drawingml/2006/main">
               <a:ext uri="{FF2B5EF4-FFF2-40B4-BE49-F238E27FC236}">
-                <a16:creationId xmlns:a16="http://schemas.microsoft.com/office/drawing/2014/main" id="{F6419E4C-E17D-4AF1-AA27-EEC64ABAC7F9}"/>
+                <a16:creationId xmlns:a16="http://schemas.microsoft.com/office/drawing/2014/main" id="{D246091C-00FC-4681-852A-C28C90D76C19}"/>
               </a:ext>
             </a:extLst>
           </p:cNvPr>
@@ -11097,7 +10954,7 @@
           <p:cNvPr id="15" name="">
             <a:extLst xmlns:a="http://schemas.openxmlformats.org/drawingml/2006/main">
               <a:ext uri="{FF2B5EF4-FFF2-40B4-BE49-F238E27FC236}">
-                <a16:creationId xmlns:a16="http://schemas.microsoft.com/office/drawing/2014/main" id="{2A82458B-04DF-424B-BDDC-11058A3E8756}"/>
+                <a16:creationId xmlns:a16="http://schemas.microsoft.com/office/drawing/2014/main" id="{6943FC6B-7EAA-4FBB-B089-D4AA80B2878B}"/>
               </a:ext>
             </a:extLst>
           </p:cNvPr>
@@ -11152,7 +11009,7 @@
     </p:spTree>
     <p:extLst>
       <p:ext uri="{BB962C8B-B14F-4D97-AF65-F5344CB8AC3E}">
-        <p14:creationId xmlns:p14="http://schemas.microsoft.com/office/powerpoint/2010/main" val="598072722"/>
+        <p14:creationId xmlns:p14="http://schemas.microsoft.com/office/powerpoint/2010/main" val="1875464366"/>
       </p:ext>
     </p:extLst>
   </p:cSld>
@@ -11307,7 +11164,7 @@
           <p:cNvPr id="16" name="">
             <a:extLst xmlns:a="http://schemas.openxmlformats.org/drawingml/2006/main">
               <a:ext uri="{FF2B5EF4-FFF2-40B4-BE49-F238E27FC236}">
-                <a16:creationId xmlns:a16="http://schemas.microsoft.com/office/drawing/2014/main" id="{9DD9EBB9-FAC7-4D4B-A76A-2AAB4FE29866}"/>
+                <a16:creationId xmlns:a16="http://schemas.microsoft.com/office/drawing/2014/main" id="{228B9D06-6A6A-4644-9835-0879ABF88339}"/>
               </a:ext>
             </a:extLst>
           </p:cNvPr>
@@ -11339,7 +11196,7 @@
           <p:cNvPr id="2" name="">
             <a:extLst xmlns:a="http://schemas.openxmlformats.org/drawingml/2006/main">
               <a:ext uri="{FF2B5EF4-FFF2-40B4-BE49-F238E27FC236}">
-                <a16:creationId xmlns:a16="http://schemas.microsoft.com/office/drawing/2014/main" id="{85311180-4F2E-4F7A-A5BB-8E0A90CC53A0}"/>
+                <a16:creationId xmlns:a16="http://schemas.microsoft.com/office/drawing/2014/main" id="{D5569D74-42DD-42B3-946B-A68F0685E2D6}"/>
               </a:ext>
             </a:extLst>
           </p:cNvPr>
@@ -11396,7 +11253,7 @@
           <p:cNvPr id="3" name="">
             <a:extLst xmlns:a="http://schemas.openxmlformats.org/drawingml/2006/main">
               <a:ext uri="{FF2B5EF4-FFF2-40B4-BE49-F238E27FC236}">
-                <a16:creationId xmlns:a16="http://schemas.microsoft.com/office/drawing/2014/main" id="{CDE630E6-D3AA-470A-A99E-FE2707337463}"/>
+                <a16:creationId xmlns:a16="http://schemas.microsoft.com/office/drawing/2014/main" id="{B4626260-7259-445D-8715-3A550E5B6707}"/>
               </a:ext>
             </a:extLst>
           </p:cNvPr>
@@ -11428,7 +11285,7 @@
           <p:cNvPr id="4" name="">
             <a:extLst xmlns:a="http://schemas.openxmlformats.org/drawingml/2006/main">
               <a:ext uri="{FF2B5EF4-FFF2-40B4-BE49-F238E27FC236}">
-                <a16:creationId xmlns:a16="http://schemas.microsoft.com/office/drawing/2014/main" id="{577CBBE4-0E0B-4083-B3E7-4425031C0B4C}"/>
+                <a16:creationId xmlns:a16="http://schemas.microsoft.com/office/drawing/2014/main" id="{47876391-6A7F-4248-A7F1-5A1DA0FC6B82}"/>
               </a:ext>
             </a:extLst>
           </p:cNvPr>
@@ -11485,7 +11342,7 @@
           <p:cNvPr id="5" name="">
             <a:extLst xmlns:a="http://schemas.openxmlformats.org/drawingml/2006/main">
               <a:ext uri="{FF2B5EF4-FFF2-40B4-BE49-F238E27FC236}">
-                <a16:creationId xmlns:a16="http://schemas.microsoft.com/office/drawing/2014/main" id="{6702BC31-2A1D-4C70-B334-09937B294EB4}"/>
+                <a16:creationId xmlns:a16="http://schemas.microsoft.com/office/drawing/2014/main" id="{9DB9D491-55BA-4DCB-BDD2-A62F7E76C29E}"/>
               </a:ext>
             </a:extLst>
           </p:cNvPr>
@@ -11542,7 +11399,7 @@
           <p:cNvPr id="6" name="">
             <a:extLst xmlns:a="http://schemas.openxmlformats.org/drawingml/2006/main">
               <a:ext uri="{FF2B5EF4-FFF2-40B4-BE49-F238E27FC236}">
-                <a16:creationId xmlns:a16="http://schemas.microsoft.com/office/drawing/2014/main" id="{71E23D2F-E457-428B-A48B-396FB4581463}"/>
+                <a16:creationId xmlns:a16="http://schemas.microsoft.com/office/drawing/2014/main" id="{DF8A8C2E-3BB5-4337-84F2-3869F0C3CFDD}"/>
               </a:ext>
             </a:extLst>
           </p:cNvPr>
@@ -11599,7 +11456,7 @@
           <p:cNvPr id="7" name="">
             <a:extLst xmlns:a="http://schemas.openxmlformats.org/drawingml/2006/main">
               <a:ext uri="{FF2B5EF4-FFF2-40B4-BE49-F238E27FC236}">
-                <a16:creationId xmlns:a16="http://schemas.microsoft.com/office/drawing/2014/main" id="{3FD6D276-36CB-40E3-81DD-06E534A671B1}"/>
+                <a16:creationId xmlns:a16="http://schemas.microsoft.com/office/drawing/2014/main" id="{E2C362B1-CAF6-4439-96DD-78269FA18949}"/>
               </a:ext>
             </a:extLst>
           </p:cNvPr>
@@ -11631,7 +11488,7 @@
           <p:cNvPr id="8" name="">
             <a:extLst xmlns:a="http://schemas.openxmlformats.org/drawingml/2006/main">
               <a:ext uri="{FF2B5EF4-FFF2-40B4-BE49-F238E27FC236}">
-                <a16:creationId xmlns:a16="http://schemas.microsoft.com/office/drawing/2014/main" id="{E5F96D24-2D5B-4850-97FC-7023A0A88131}"/>
+                <a16:creationId xmlns:a16="http://schemas.microsoft.com/office/drawing/2014/main" id="{E772E4DC-A69B-4A4C-B6CF-AAC0741E51C5}"/>
               </a:ext>
             </a:extLst>
           </p:cNvPr>
@@ -11688,7 +11545,7 @@
           <p:cNvPr id="9" name="">
             <a:extLst xmlns:a="http://schemas.openxmlformats.org/drawingml/2006/main">
               <a:ext uri="{FF2B5EF4-FFF2-40B4-BE49-F238E27FC236}">
-                <a16:creationId xmlns:a16="http://schemas.microsoft.com/office/drawing/2014/main" id="{D1386E94-BEF8-4E41-9308-7A1F4C5A07D2}"/>
+                <a16:creationId xmlns:a16="http://schemas.microsoft.com/office/drawing/2014/main" id="{59AA85F5-A371-43C5-8898-A8B7215C6676}"/>
               </a:ext>
             </a:extLst>
           </p:cNvPr>
@@ -11749,7 +11606,7 @@
           <p:nvPr/>
         </p:nvPicPr>
         <p:blipFill>
-          <a:blip xmlns:r="http://schemas.openxmlformats.org/officeDocument/2006/relationships" xmlns:a="http://schemas.openxmlformats.org/drawingml/2006/main" r:embed="Rf62143cea1d24d19"/>
+          <a:blip xmlns:r="http://schemas.openxmlformats.org/officeDocument/2006/relationships" xmlns:a="http://schemas.openxmlformats.org/drawingml/2006/main" r:embed="Ra83b1f31bd5b4725"/>
           <a:stretch xmlns:a="http://schemas.openxmlformats.org/drawingml/2006/main"/>
         </p:blipFill>
         <p:spPr>
@@ -11767,7 +11624,7 @@
           <p:cNvPr id="11" name="">
             <a:extLst xmlns:a="http://schemas.openxmlformats.org/drawingml/2006/main">
               <a:ext uri="{FF2B5EF4-FFF2-40B4-BE49-F238E27FC236}">
-                <a16:creationId xmlns:a16="http://schemas.microsoft.com/office/drawing/2014/main" id="{35EDDE57-B902-4196-93D3-E242F31B1FEA}"/>
+                <a16:creationId xmlns:a16="http://schemas.microsoft.com/office/drawing/2014/main" id="{6331CF3D-BFD4-44CE-BB86-C74120706E8C}"/>
               </a:ext>
             </a:extLst>
           </p:cNvPr>
@@ -11824,7 +11681,7 @@
           <p:cNvPr id="12" name="">
             <a:extLst xmlns:a="http://schemas.openxmlformats.org/drawingml/2006/main">
               <a:ext uri="{FF2B5EF4-FFF2-40B4-BE49-F238E27FC236}">
-                <a16:creationId xmlns:a16="http://schemas.microsoft.com/office/drawing/2014/main" id="{B4F3EFA2-A5C2-4CAE-8CD1-A260191D87D3}"/>
+                <a16:creationId xmlns:a16="http://schemas.microsoft.com/office/drawing/2014/main" id="{8321D827-9976-40BA-85D5-8D8966F9CD9C}"/>
               </a:ext>
             </a:extLst>
           </p:cNvPr>
@@ -11881,7 +11738,7 @@
           <p:cNvPr id="13" name="">
             <a:extLst xmlns:a="http://schemas.openxmlformats.org/drawingml/2006/main">
               <a:ext uri="{FF2B5EF4-FFF2-40B4-BE49-F238E27FC236}">
-                <a16:creationId xmlns:a16="http://schemas.microsoft.com/office/drawing/2014/main" id="{6CE6959A-AF61-4C1D-BCA6-123B04128334}"/>
+                <a16:creationId xmlns:a16="http://schemas.microsoft.com/office/drawing/2014/main" id="{73DF12F5-6161-4E78-9CD2-4E69CAC1D974}"/>
               </a:ext>
             </a:extLst>
           </p:cNvPr>
@@ -11913,7 +11770,7 @@
           <p:cNvPr id="14" name="">
             <a:extLst xmlns:a="http://schemas.openxmlformats.org/drawingml/2006/main">
               <a:ext uri="{FF2B5EF4-FFF2-40B4-BE49-F238E27FC236}">
-                <a16:creationId xmlns:a16="http://schemas.microsoft.com/office/drawing/2014/main" id="{F45121A0-2F1D-4F19-879B-D94BC3ECD682}"/>
+                <a16:creationId xmlns:a16="http://schemas.microsoft.com/office/drawing/2014/main" id="{CEA630A1-7B6C-4918-80B2-2A9D22638134}"/>
               </a:ext>
             </a:extLst>
           </p:cNvPr>
@@ -11970,7 +11827,7 @@
           <p:cNvPr id="15" name="">
             <a:extLst xmlns:a="http://schemas.openxmlformats.org/drawingml/2006/main">
               <a:ext uri="{FF2B5EF4-FFF2-40B4-BE49-F238E27FC236}">
-                <a16:creationId xmlns:a16="http://schemas.microsoft.com/office/drawing/2014/main" id="{87059028-BF6F-4C44-AA55-55116F1407EA}"/>
+                <a16:creationId xmlns:a16="http://schemas.microsoft.com/office/drawing/2014/main" id="{CCE5E24B-6B34-4B33-9313-9AFBCD18FA84}"/>
               </a:ext>
             </a:extLst>
           </p:cNvPr>
@@ -12025,7 +11882,7 @@
     </p:spTree>
     <p:extLst>
       <p:ext uri="{BB962C8B-B14F-4D97-AF65-F5344CB8AC3E}">
-        <p14:creationId xmlns:p14="http://schemas.microsoft.com/office/powerpoint/2010/main" val="850025854"/>
+        <p14:creationId xmlns:p14="http://schemas.microsoft.com/office/powerpoint/2010/main" val="1928050437"/>
       </p:ext>
     </p:extLst>
   </p:cSld>
@@ -12180,7 +12037,7 @@
           <p:cNvPr id="23" name="">
             <a:extLst xmlns:a="http://schemas.openxmlformats.org/drawingml/2006/main">
               <a:ext uri="{FF2B5EF4-FFF2-40B4-BE49-F238E27FC236}">
-                <a16:creationId xmlns:a16="http://schemas.microsoft.com/office/drawing/2014/main" id="{B8B628F7-7F82-484B-945B-2CAF6B350F8E}"/>
+                <a16:creationId xmlns:a16="http://schemas.microsoft.com/office/drawing/2014/main" id="{65D460DC-9655-4E08-9A69-16217C9569ED}"/>
               </a:ext>
             </a:extLst>
           </p:cNvPr>
@@ -12212,7 +12069,7 @@
           <p:cNvPr id="2" name="">
             <a:extLst xmlns:a="http://schemas.openxmlformats.org/drawingml/2006/main">
               <a:ext uri="{FF2B5EF4-FFF2-40B4-BE49-F238E27FC236}">
-                <a16:creationId xmlns:a16="http://schemas.microsoft.com/office/drawing/2014/main" id="{22E95103-EB68-422F-A9B8-75DE52135FD5}"/>
+                <a16:creationId xmlns:a16="http://schemas.microsoft.com/office/drawing/2014/main" id="{52D80309-7D2B-4EDD-8BDC-F5816687C916}"/>
               </a:ext>
             </a:extLst>
           </p:cNvPr>
@@ -12269,7 +12126,7 @@
           <p:cNvPr id="3" name="">
             <a:extLst xmlns:a="http://schemas.openxmlformats.org/drawingml/2006/main">
               <a:ext uri="{FF2B5EF4-FFF2-40B4-BE49-F238E27FC236}">
-                <a16:creationId xmlns:a16="http://schemas.microsoft.com/office/drawing/2014/main" id="{0751197F-2943-4550-B875-79D1CE53EDF1}"/>
+                <a16:creationId xmlns:a16="http://schemas.microsoft.com/office/drawing/2014/main" id="{004B6DF3-9C7E-4F72-84F0-44B6F8E0D773}"/>
               </a:ext>
             </a:extLst>
           </p:cNvPr>
@@ -12301,7 +12158,7 @@
           <p:cNvPr id="4" name="">
             <a:extLst xmlns:a="http://schemas.openxmlformats.org/drawingml/2006/main">
               <a:ext uri="{FF2B5EF4-FFF2-40B4-BE49-F238E27FC236}">
-                <a16:creationId xmlns:a16="http://schemas.microsoft.com/office/drawing/2014/main" id="{6AEC9395-3513-43EC-BD20-42B3E949465D}"/>
+                <a16:creationId xmlns:a16="http://schemas.microsoft.com/office/drawing/2014/main" id="{1DCF8E82-44BF-480A-AD63-999612E6E82A}"/>
               </a:ext>
             </a:extLst>
           </p:cNvPr>
@@ -12358,7 +12215,7 @@
           <p:cNvPr id="5" name="">
             <a:extLst xmlns:a="http://schemas.openxmlformats.org/drawingml/2006/main">
               <a:ext uri="{FF2B5EF4-FFF2-40B4-BE49-F238E27FC236}">
-                <a16:creationId xmlns:a16="http://schemas.microsoft.com/office/drawing/2014/main" id="{7CC4A481-583D-4B1B-9DD0-67362FBA58C6}"/>
+                <a16:creationId xmlns:a16="http://schemas.microsoft.com/office/drawing/2014/main" id="{877464D6-0E5C-4C7F-B81B-1D178A00497A}"/>
               </a:ext>
             </a:extLst>
           </p:cNvPr>
@@ -12415,7 +12272,7 @@
           <p:cNvPr id="6" name="">
             <a:extLst xmlns:a="http://schemas.openxmlformats.org/drawingml/2006/main">
               <a:ext uri="{FF2B5EF4-FFF2-40B4-BE49-F238E27FC236}">
-                <a16:creationId xmlns:a16="http://schemas.microsoft.com/office/drawing/2014/main" id="{84918F93-297F-4F11-B141-E40ECD1BA27C}"/>
+                <a16:creationId xmlns:a16="http://schemas.microsoft.com/office/drawing/2014/main" id="{65F2E356-A653-4836-A6ED-90825FF70589}"/>
               </a:ext>
             </a:extLst>
           </p:cNvPr>
@@ -12472,7 +12329,7 @@
           <p:cNvPr id="7" name="">
             <a:extLst xmlns:a="http://schemas.openxmlformats.org/drawingml/2006/main">
               <a:ext uri="{FF2B5EF4-FFF2-40B4-BE49-F238E27FC236}">
-                <a16:creationId xmlns:a16="http://schemas.microsoft.com/office/drawing/2014/main" id="{788268A2-7F03-4A36-A5CC-22F5ACA61D5C}"/>
+                <a16:creationId xmlns:a16="http://schemas.microsoft.com/office/drawing/2014/main" id="{916ADC5F-8176-45FA-9CEE-CF03F6A9A7E6}"/>
               </a:ext>
             </a:extLst>
           </p:cNvPr>
@@ -12504,7 +12361,7 @@
           <p:cNvPr id="8" name="">
             <a:extLst xmlns:a="http://schemas.openxmlformats.org/drawingml/2006/main">
               <a:ext uri="{FF2B5EF4-FFF2-40B4-BE49-F238E27FC236}">
-                <a16:creationId xmlns:a16="http://schemas.microsoft.com/office/drawing/2014/main" id="{ADBBD050-4BEB-4411-9F12-EE133ECDCA29}"/>
+                <a16:creationId xmlns:a16="http://schemas.microsoft.com/office/drawing/2014/main" id="{1B9E4469-8CF0-4F2E-9B8E-FEF219757022}"/>
               </a:ext>
             </a:extLst>
           </p:cNvPr>
@@ -12561,7 +12418,7 @@
           <p:cNvPr id="9" name="">
             <a:extLst xmlns:a="http://schemas.openxmlformats.org/drawingml/2006/main">
               <a:ext uri="{FF2B5EF4-FFF2-40B4-BE49-F238E27FC236}">
-                <a16:creationId xmlns:a16="http://schemas.microsoft.com/office/drawing/2014/main" id="{B9DCFCDA-0041-447F-A6D2-43F3A4F63028}"/>
+                <a16:creationId xmlns:a16="http://schemas.microsoft.com/office/drawing/2014/main" id="{75127D72-D8AC-46C1-A69C-E33B63E0496D}"/>
               </a:ext>
             </a:extLst>
           </p:cNvPr>
@@ -12618,7 +12475,7 @@
           <p:cNvPr id="10" name="">
             <a:extLst xmlns:a="http://schemas.openxmlformats.org/drawingml/2006/main">
               <a:ext uri="{FF2B5EF4-FFF2-40B4-BE49-F238E27FC236}">
-                <a16:creationId xmlns:a16="http://schemas.microsoft.com/office/drawing/2014/main" id="{492A661F-3B79-4332-8DB6-80CF9ECA0B15}"/>
+                <a16:creationId xmlns:a16="http://schemas.microsoft.com/office/drawing/2014/main" id="{590430EE-E115-48CE-AFF7-59418E4533BE}"/>
               </a:ext>
             </a:extLst>
           </p:cNvPr>
@@ -12652,7 +12509,7 @@
           <p:cNvPr id="11" name="">
             <a:extLst xmlns:a="http://schemas.openxmlformats.org/drawingml/2006/main">
               <a:ext uri="{FF2B5EF4-FFF2-40B4-BE49-F238E27FC236}">
-                <a16:creationId xmlns:a16="http://schemas.microsoft.com/office/drawing/2014/main" id="{24BF33E1-1336-4E30-B8DD-077492F98819}"/>
+                <a16:creationId xmlns:a16="http://schemas.microsoft.com/office/drawing/2014/main" id="{0572A3CA-C39B-4DF5-A17B-A125FAC0AA23}"/>
               </a:ext>
             </a:extLst>
           </p:cNvPr>
@@ -12684,7 +12541,7 @@
           <p:cNvPr id="12" name="">
             <a:extLst xmlns:a="http://schemas.openxmlformats.org/drawingml/2006/main">
               <a:ext uri="{FF2B5EF4-FFF2-40B4-BE49-F238E27FC236}">
-                <a16:creationId xmlns:a16="http://schemas.microsoft.com/office/drawing/2014/main" id="{281ADC8C-7AFE-4275-8147-B17625DE3F5C}"/>
+                <a16:creationId xmlns:a16="http://schemas.microsoft.com/office/drawing/2014/main" id="{92D783FD-56B3-4BE5-A2D8-CD4E7CE216F3}"/>
               </a:ext>
             </a:extLst>
           </p:cNvPr>
@@ -12741,7 +12598,7 @@
           <p:cNvPr id="13" name="">
             <a:extLst xmlns:a="http://schemas.openxmlformats.org/drawingml/2006/main">
               <a:ext uri="{FF2B5EF4-FFF2-40B4-BE49-F238E27FC236}">
-                <a16:creationId xmlns:a16="http://schemas.microsoft.com/office/drawing/2014/main" id="{1840E102-DFF1-4A35-A28B-30FEA452EB95}"/>
+                <a16:creationId xmlns:a16="http://schemas.microsoft.com/office/drawing/2014/main" id="{72ED7A96-BA32-46AE-B2A1-7FE72F4F37AD}"/>
               </a:ext>
             </a:extLst>
           </p:cNvPr>
@@ -12798,7 +12655,7 @@
           <p:cNvPr id="14" name="">
             <a:extLst xmlns:a="http://schemas.openxmlformats.org/drawingml/2006/main">
               <a:ext uri="{FF2B5EF4-FFF2-40B4-BE49-F238E27FC236}">
-                <a16:creationId xmlns:a16="http://schemas.microsoft.com/office/drawing/2014/main" id="{45AEFDA8-B7C7-4706-B2FD-01EE4711F76D}"/>
+                <a16:creationId xmlns:a16="http://schemas.microsoft.com/office/drawing/2014/main" id="{7DD7495C-F0EC-4796-AFF0-116CCE9239D5}"/>
               </a:ext>
             </a:extLst>
           </p:cNvPr>
@@ -12832,7 +12689,7 @@
           <p:cNvPr id="15" name="">
             <a:extLst xmlns:a="http://schemas.openxmlformats.org/drawingml/2006/main">
               <a:ext uri="{FF2B5EF4-FFF2-40B4-BE49-F238E27FC236}">
-                <a16:creationId xmlns:a16="http://schemas.microsoft.com/office/drawing/2014/main" id="{3B9F3369-9F64-4AFC-9C75-0E920DA3ED58}"/>
+                <a16:creationId xmlns:a16="http://schemas.microsoft.com/office/drawing/2014/main" id="{B061AFF9-D83D-4B49-93DE-45FD7521C7CE}"/>
               </a:ext>
             </a:extLst>
           </p:cNvPr>
@@ -12864,7 +12721,7 @@
           <p:cNvPr id="16" name="">
             <a:extLst xmlns:a="http://schemas.openxmlformats.org/drawingml/2006/main">
               <a:ext uri="{FF2B5EF4-FFF2-40B4-BE49-F238E27FC236}">
-                <a16:creationId xmlns:a16="http://schemas.microsoft.com/office/drawing/2014/main" id="{A8222029-2422-4C38-B861-65449402153D}"/>
+                <a16:creationId xmlns:a16="http://schemas.microsoft.com/office/drawing/2014/main" id="{39E7FC4F-5BDC-4814-8659-E653304F4F1F}"/>
               </a:ext>
             </a:extLst>
           </p:cNvPr>
@@ -12921,7 +12778,7 @@
           <p:cNvPr id="17" name="">
             <a:extLst xmlns:a="http://schemas.openxmlformats.org/drawingml/2006/main">
               <a:ext uri="{FF2B5EF4-FFF2-40B4-BE49-F238E27FC236}">
-                <a16:creationId xmlns:a16="http://schemas.microsoft.com/office/drawing/2014/main" id="{FD0F574E-0D9C-4A86-8160-8EC2605E3F31}"/>
+                <a16:creationId xmlns:a16="http://schemas.microsoft.com/office/drawing/2014/main" id="{C6ED6CBD-45C9-4677-85D8-BF5D1830B6C6}"/>
               </a:ext>
             </a:extLst>
           </p:cNvPr>
@@ -12978,7 +12835,7 @@
           <p:cNvPr id="18" name="">
             <a:extLst xmlns:a="http://schemas.openxmlformats.org/drawingml/2006/main">
               <a:ext uri="{FF2B5EF4-FFF2-40B4-BE49-F238E27FC236}">
-                <a16:creationId xmlns:a16="http://schemas.microsoft.com/office/drawing/2014/main" id="{8C9853DC-EC4D-46C4-A7B7-D63901026627}"/>
+                <a16:creationId xmlns:a16="http://schemas.microsoft.com/office/drawing/2014/main" id="{198DF9A5-9807-4015-B635-B1FFAE533C85}"/>
               </a:ext>
             </a:extLst>
           </p:cNvPr>
@@ -13012,7 +12869,7 @@
           <p:cNvPr id="19" name="">
             <a:extLst xmlns:a="http://schemas.openxmlformats.org/drawingml/2006/main">
               <a:ext uri="{FF2B5EF4-FFF2-40B4-BE49-F238E27FC236}">
-                <a16:creationId xmlns:a16="http://schemas.microsoft.com/office/drawing/2014/main" id="{1E153C4E-158F-4BE1-B05B-E24463A196C4}"/>
+                <a16:creationId xmlns:a16="http://schemas.microsoft.com/office/drawing/2014/main" id="{624F737A-8A09-4693-B73C-3F9FFFF0D703}"/>
               </a:ext>
             </a:extLst>
           </p:cNvPr>
@@ -13044,7 +12901,7 @@
           <p:cNvPr id="20" name="">
             <a:extLst xmlns:a="http://schemas.openxmlformats.org/drawingml/2006/main">
               <a:ext uri="{FF2B5EF4-FFF2-40B4-BE49-F238E27FC236}">
-                <a16:creationId xmlns:a16="http://schemas.microsoft.com/office/drawing/2014/main" id="{90242A46-3C51-40A9-9373-5B9F9566EA1D}"/>
+                <a16:creationId xmlns:a16="http://schemas.microsoft.com/office/drawing/2014/main" id="{56881FD1-9D38-4FEA-8FD0-9E36DF65978B}"/>
               </a:ext>
             </a:extLst>
           </p:cNvPr>
@@ -13101,7 +12958,7 @@
           <p:cNvPr id="21" name="">
             <a:extLst xmlns:a="http://schemas.openxmlformats.org/drawingml/2006/main">
               <a:ext uri="{FF2B5EF4-FFF2-40B4-BE49-F238E27FC236}">
-                <a16:creationId xmlns:a16="http://schemas.microsoft.com/office/drawing/2014/main" id="{1CA218A4-3E7A-4F10-A9B9-0A324DB6D0D5}"/>
+                <a16:creationId xmlns:a16="http://schemas.microsoft.com/office/drawing/2014/main" id="{A721ABE5-055D-4ACC-B38D-39255F298E8A}"/>
               </a:ext>
             </a:extLst>
           </p:cNvPr>
@@ -13158,7 +13015,7 @@
           <p:cNvPr id="22" name="">
             <a:extLst xmlns:a="http://schemas.openxmlformats.org/drawingml/2006/main">
               <a:ext uri="{FF2B5EF4-FFF2-40B4-BE49-F238E27FC236}">
-                <a16:creationId xmlns:a16="http://schemas.microsoft.com/office/drawing/2014/main" id="{A99C2ED4-93ED-4ABC-95A9-463CAF8277AA}"/>
+                <a16:creationId xmlns:a16="http://schemas.microsoft.com/office/drawing/2014/main" id="{1A09A6F7-4D84-446B-A07C-2AEE8B5A8172}"/>
               </a:ext>
             </a:extLst>
           </p:cNvPr>
@@ -13213,7 +13070,7 @@
     </p:spTree>
     <p:extLst>
       <p:ext uri="{BB962C8B-B14F-4D97-AF65-F5344CB8AC3E}">
-        <p14:creationId xmlns:p14="http://schemas.microsoft.com/office/powerpoint/2010/main" val="166101297"/>
+        <p14:creationId xmlns:p14="http://schemas.microsoft.com/office/powerpoint/2010/main" val="2004565971"/>
       </p:ext>
     </p:extLst>
   </p:cSld>
@@ -13414,7 +13271,7 @@
           <p:cNvPr id="22" name="">
             <a:extLst xmlns:a="http://schemas.openxmlformats.org/drawingml/2006/main">
               <a:ext uri="{FF2B5EF4-FFF2-40B4-BE49-F238E27FC236}">
-                <a16:creationId xmlns:a16="http://schemas.microsoft.com/office/drawing/2014/main" id="{43BD4B51-4D2F-4AD1-926E-738B6F2EDB01}"/>
+                <a16:creationId xmlns:a16="http://schemas.microsoft.com/office/drawing/2014/main" id="{B171714A-AAB1-44FD-B404-F6A6996E657C}"/>
               </a:ext>
             </a:extLst>
           </p:cNvPr>
@@ -13446,7 +13303,7 @@
           <p:cNvPr id="2" name="">
             <a:extLst xmlns:a="http://schemas.openxmlformats.org/drawingml/2006/main">
               <a:ext uri="{FF2B5EF4-FFF2-40B4-BE49-F238E27FC236}">
-                <a16:creationId xmlns:a16="http://schemas.microsoft.com/office/drawing/2014/main" id="{13B185E8-0850-4EAF-88E1-AA27AD89EE91}"/>
+                <a16:creationId xmlns:a16="http://schemas.microsoft.com/office/drawing/2014/main" id="{57057121-B665-4DD8-8E2B-259B63DA2EF6}"/>
               </a:ext>
             </a:extLst>
           </p:cNvPr>
@@ -13503,7 +13360,7 @@
           <p:cNvPr id="3" name="">
             <a:extLst xmlns:a="http://schemas.openxmlformats.org/drawingml/2006/main">
               <a:ext uri="{FF2B5EF4-FFF2-40B4-BE49-F238E27FC236}">
-                <a16:creationId xmlns:a16="http://schemas.microsoft.com/office/drawing/2014/main" id="{63F81573-8C35-4330-B2FD-0F353DC0017C}"/>
+                <a16:creationId xmlns:a16="http://schemas.microsoft.com/office/drawing/2014/main" id="{C94AAA38-1E7B-45F1-A752-CA3F5DF677F7}"/>
               </a:ext>
             </a:extLst>
           </p:cNvPr>
@@ -13535,7 +13392,7 @@
           <p:cNvPr id="4" name="">
             <a:extLst xmlns:a="http://schemas.openxmlformats.org/drawingml/2006/main">
               <a:ext uri="{FF2B5EF4-FFF2-40B4-BE49-F238E27FC236}">
-                <a16:creationId xmlns:a16="http://schemas.microsoft.com/office/drawing/2014/main" id="{A668F503-9612-4027-824D-D8D715F1F45D}"/>
+                <a16:creationId xmlns:a16="http://schemas.microsoft.com/office/drawing/2014/main" id="{F401B840-B8ED-404C-B0F2-EE7219574484}"/>
               </a:ext>
             </a:extLst>
           </p:cNvPr>
@@ -13592,7 +13449,7 @@
           <p:cNvPr id="5" name="">
             <a:extLst xmlns:a="http://schemas.openxmlformats.org/drawingml/2006/main">
               <a:ext uri="{FF2B5EF4-FFF2-40B4-BE49-F238E27FC236}">
-                <a16:creationId xmlns:a16="http://schemas.microsoft.com/office/drawing/2014/main" id="{EBFB513E-FF53-46C6-9639-00C9FC422109}"/>
+                <a16:creationId xmlns:a16="http://schemas.microsoft.com/office/drawing/2014/main" id="{4C49444D-5EC0-4745-9B99-8CC3D0B0695A}"/>
               </a:ext>
             </a:extLst>
           </p:cNvPr>
@@ -13649,7 +13506,7 @@
           <p:cNvPr id="6" name="">
             <a:extLst xmlns:a="http://schemas.openxmlformats.org/drawingml/2006/main">
               <a:ext uri="{FF2B5EF4-FFF2-40B4-BE49-F238E27FC236}">
-                <a16:creationId xmlns:a16="http://schemas.microsoft.com/office/drawing/2014/main" id="{827B4961-7961-4320-BEB7-3BB00968B87A}"/>
+                <a16:creationId xmlns:a16="http://schemas.microsoft.com/office/drawing/2014/main" id="{3BA3F657-B2F9-4962-A436-899824BCD43B}"/>
               </a:ext>
             </a:extLst>
           </p:cNvPr>
@@ -13706,7 +13563,7 @@
           <p:cNvPr id="7" name="">
             <a:extLst xmlns:a="http://schemas.openxmlformats.org/drawingml/2006/main">
               <a:ext uri="{FF2B5EF4-FFF2-40B4-BE49-F238E27FC236}">
-                <a16:creationId xmlns:a16="http://schemas.microsoft.com/office/drawing/2014/main" id="{08015F88-52C3-411B-ADD7-A09824B83831}"/>
+                <a16:creationId xmlns:a16="http://schemas.microsoft.com/office/drawing/2014/main" id="{28EEB454-3ED8-4E70-AB5B-6907B76D1606}"/>
               </a:ext>
             </a:extLst>
           </p:cNvPr>
@@ -13738,7 +13595,7 @@
           <p:cNvPr id="8" name="">
             <a:extLst xmlns:a="http://schemas.openxmlformats.org/drawingml/2006/main">
               <a:ext uri="{FF2B5EF4-FFF2-40B4-BE49-F238E27FC236}">
-                <a16:creationId xmlns:a16="http://schemas.microsoft.com/office/drawing/2014/main" id="{B82F5C0E-2DBC-42A7-8ADA-2FB7783F0FBF}"/>
+                <a16:creationId xmlns:a16="http://schemas.microsoft.com/office/drawing/2014/main" id="{3E0A9E89-9E24-4CD9-8C3F-0F98EA09CBB9}"/>
               </a:ext>
             </a:extLst>
           </p:cNvPr>
@@ -13795,7 +13652,7 @@
           <p:cNvPr id="9" name="">
             <a:extLst xmlns:a="http://schemas.openxmlformats.org/drawingml/2006/main">
               <a:ext uri="{FF2B5EF4-FFF2-40B4-BE49-F238E27FC236}">
-                <a16:creationId xmlns:a16="http://schemas.microsoft.com/office/drawing/2014/main" id="{0A5EA520-2CA1-4110-89B6-62559DDFBCD4}"/>
+                <a16:creationId xmlns:a16="http://schemas.microsoft.com/office/drawing/2014/main" id="{19460AAF-8A9C-4720-94D2-E5A03AD02612}"/>
               </a:ext>
             </a:extLst>
           </p:cNvPr>
@@ -13852,7 +13709,7 @@
           <p:cNvPr id="10" name="">
             <a:extLst xmlns:a="http://schemas.openxmlformats.org/drawingml/2006/main">
               <a:ext uri="{FF2B5EF4-FFF2-40B4-BE49-F238E27FC236}">
-                <a16:creationId xmlns:a16="http://schemas.microsoft.com/office/drawing/2014/main" id="{564B294B-DC25-4E11-83CB-CEEBFCA70612}"/>
+                <a16:creationId xmlns:a16="http://schemas.microsoft.com/office/drawing/2014/main" id="{746D77FB-0819-4EDC-B9E5-940A79B8A525}"/>
               </a:ext>
             </a:extLst>
           </p:cNvPr>
@@ -13886,7 +13743,7 @@
           <p:cNvPr id="11" name="">
             <a:extLst xmlns:a="http://schemas.openxmlformats.org/drawingml/2006/main">
               <a:ext uri="{FF2B5EF4-FFF2-40B4-BE49-F238E27FC236}">
-                <a16:creationId xmlns:a16="http://schemas.microsoft.com/office/drawing/2014/main" id="{9977C681-688F-45D1-BAB8-2222BA3884DA}"/>
+                <a16:creationId xmlns:a16="http://schemas.microsoft.com/office/drawing/2014/main" id="{49778099-B288-4DFD-BB9E-F8B7D03C061A}"/>
               </a:ext>
             </a:extLst>
           </p:cNvPr>
@@ -13918,7 +13775,7 @@
           <p:cNvPr id="12" name="">
             <a:extLst xmlns:a="http://schemas.openxmlformats.org/drawingml/2006/main">
               <a:ext uri="{FF2B5EF4-FFF2-40B4-BE49-F238E27FC236}">
-                <a16:creationId xmlns:a16="http://schemas.microsoft.com/office/drawing/2014/main" id="{F6DAB300-D635-4A2C-8ABD-6299995FB665}"/>
+                <a16:creationId xmlns:a16="http://schemas.microsoft.com/office/drawing/2014/main" id="{D0D9768A-142D-44CE-947E-7ABC72FD3184}"/>
               </a:ext>
             </a:extLst>
           </p:cNvPr>
@@ -13975,7 +13832,7 @@
           <p:cNvPr id="13" name="">
             <a:extLst xmlns:a="http://schemas.openxmlformats.org/drawingml/2006/main">
               <a:ext uri="{FF2B5EF4-FFF2-40B4-BE49-F238E27FC236}">
-                <a16:creationId xmlns:a16="http://schemas.microsoft.com/office/drawing/2014/main" id="{29179A58-A58D-4CED-AE6E-9FE71D10CF40}"/>
+                <a16:creationId xmlns:a16="http://schemas.microsoft.com/office/drawing/2014/main" id="{FD85E5C7-12F6-4F45-ADC9-8FE5EBF1DDE7}"/>
               </a:ext>
             </a:extLst>
           </p:cNvPr>
@@ -14032,7 +13889,7 @@
           <p:cNvPr id="14" name="">
             <a:extLst xmlns:a="http://schemas.openxmlformats.org/drawingml/2006/main">
               <a:ext uri="{FF2B5EF4-FFF2-40B4-BE49-F238E27FC236}">
-                <a16:creationId xmlns:a16="http://schemas.microsoft.com/office/drawing/2014/main" id="{C2A2A962-F995-4EFE-B2A1-0249337675ED}"/>
+                <a16:creationId xmlns:a16="http://schemas.microsoft.com/office/drawing/2014/main" id="{5497B096-8340-4DAD-8D45-7C9B03A28FE0}"/>
               </a:ext>
             </a:extLst>
           </p:cNvPr>
@@ -14066,7 +13923,7 @@
           <p:cNvPr id="15" name="">
             <a:extLst xmlns:a="http://schemas.openxmlformats.org/drawingml/2006/main">
               <a:ext uri="{FF2B5EF4-FFF2-40B4-BE49-F238E27FC236}">
-                <a16:creationId xmlns:a16="http://schemas.microsoft.com/office/drawing/2014/main" id="{5D5F68EC-1824-498F-9AFA-4CB5531602BF}"/>
+                <a16:creationId xmlns:a16="http://schemas.microsoft.com/office/drawing/2014/main" id="{BE20391B-4895-4AE5-A604-92C6B00CE7F1}"/>
               </a:ext>
             </a:extLst>
           </p:cNvPr>
@@ -14098,7 +13955,7 @@
           <p:cNvPr id="16" name="">
             <a:extLst xmlns:a="http://schemas.openxmlformats.org/drawingml/2006/main">
               <a:ext uri="{FF2B5EF4-FFF2-40B4-BE49-F238E27FC236}">
-                <a16:creationId xmlns:a16="http://schemas.microsoft.com/office/drawing/2014/main" id="{FE3F97FC-C050-4F91-9EA6-8C1113605D7B}"/>
+                <a16:creationId xmlns:a16="http://schemas.microsoft.com/office/drawing/2014/main" id="{C824036C-79D2-4743-A60C-B3372010C2AE}"/>
               </a:ext>
             </a:extLst>
           </p:cNvPr>
@@ -14155,7 +14012,7 @@
           <p:cNvPr id="17" name="">
             <a:extLst xmlns:a="http://schemas.openxmlformats.org/drawingml/2006/main">
               <a:ext uri="{FF2B5EF4-FFF2-40B4-BE49-F238E27FC236}">
-                <a16:creationId xmlns:a16="http://schemas.microsoft.com/office/drawing/2014/main" id="{8B1D0463-6E4D-45A5-8C05-A776C8B22574}"/>
+                <a16:creationId xmlns:a16="http://schemas.microsoft.com/office/drawing/2014/main" id="{4C6D330A-5C2D-43D4-99E6-02AE92C7E0CB}"/>
               </a:ext>
             </a:extLst>
           </p:cNvPr>
@@ -14212,7 +14069,7 @@
           <p:cNvPr id="18" name="">
             <a:extLst xmlns:a="http://schemas.openxmlformats.org/drawingml/2006/main">
               <a:ext uri="{FF2B5EF4-FFF2-40B4-BE49-F238E27FC236}">
-                <a16:creationId xmlns:a16="http://schemas.microsoft.com/office/drawing/2014/main" id="{5707814F-8D30-4AD6-81E9-B4DE91B4ED97}"/>
+                <a16:creationId xmlns:a16="http://schemas.microsoft.com/office/drawing/2014/main" id="{7636CE5B-841B-4315-95B2-5C1BAD0111B3}"/>
               </a:ext>
             </a:extLst>
           </p:cNvPr>
@@ -14246,7 +14103,7 @@
           <p:cNvPr id="19" name="">
             <a:extLst xmlns:a="http://schemas.openxmlformats.org/drawingml/2006/main">
               <a:ext uri="{FF2B5EF4-FFF2-40B4-BE49-F238E27FC236}">
-                <a16:creationId xmlns:a16="http://schemas.microsoft.com/office/drawing/2014/main" id="{EF37AD03-640E-446A-9EDC-FB8F25E011A2}"/>
+                <a16:creationId xmlns:a16="http://schemas.microsoft.com/office/drawing/2014/main" id="{E6DA9275-DA9E-4ADD-925A-6B66104D756B}"/>
               </a:ext>
             </a:extLst>
           </p:cNvPr>
@@ -14278,7 +14135,7 @@
           <p:cNvPr id="20" name="">
             <a:extLst xmlns:a="http://schemas.openxmlformats.org/drawingml/2006/main">
               <a:ext uri="{FF2B5EF4-FFF2-40B4-BE49-F238E27FC236}">
-                <a16:creationId xmlns:a16="http://schemas.microsoft.com/office/drawing/2014/main" id="{9D043CB4-D156-4FEC-AB39-D205827FFCC7}"/>
+                <a16:creationId xmlns:a16="http://schemas.microsoft.com/office/drawing/2014/main" id="{89BCD628-A50D-4A63-BDEE-14650D42C58E}"/>
               </a:ext>
             </a:extLst>
           </p:cNvPr>
@@ -14335,7 +14192,7 @@
           <p:cNvPr id="21" name="">
             <a:extLst xmlns:a="http://schemas.openxmlformats.org/drawingml/2006/main">
               <a:ext uri="{FF2B5EF4-FFF2-40B4-BE49-F238E27FC236}">
-                <a16:creationId xmlns:a16="http://schemas.microsoft.com/office/drawing/2014/main" id="{CBE74061-03C9-4DF9-B98D-74E70D4E3B3E}"/>
+                <a16:creationId xmlns:a16="http://schemas.microsoft.com/office/drawing/2014/main" id="{CB3A0204-0260-442A-8597-5AD60704D0B4}"/>
               </a:ext>
             </a:extLst>
           </p:cNvPr>
@@ -14390,7 +14247,7 @@
     </p:spTree>
     <p:extLst>
       <p:ext uri="{BB962C8B-B14F-4D97-AF65-F5344CB8AC3E}">
-        <p14:creationId xmlns:p14="http://schemas.microsoft.com/office/powerpoint/2010/main" val="2039773316"/>
+        <p14:creationId xmlns:p14="http://schemas.microsoft.com/office/powerpoint/2010/main" val="1761819864"/>
       </p:ext>
     </p:extLst>
   </p:cSld>
